--- a/SIH2026_SIH26066_INCOIS_OceanVisionAI.pptx
+++ b/SIH2026_SIH26066_INCOIS_OceanVisionAI.pptx
@@ -3117,8 +3117,8 @@
         </p:blipFill>
         <p:spPr>
           <a:xfrm>
-            <a:off x="731520" y="457200"/>
-            <a:ext cx="2926080" cy="1382259"/>
+            <a:off x="731520" y="320040"/>
+            <a:ext cx="2377440" cy="1123085"/>
           </a:xfrm>
           <a:prstGeom prst="rect">
             <a:avLst/>
@@ -3127,14 +3127,50 @@
       </p:pic>
       <p:sp>
         <p:nvSpPr>
-          <p:cNvPr id="3" name="Rounded Rectangle 2"/>
+          <p:cNvPr id="3" name="TextBox 2"/>
+          <p:cNvSpPr txBox="1"/>
+          <p:nvPr/>
+        </p:nvSpPr>
+        <p:spPr>
+          <a:xfrm>
+            <a:off x="10424160" y="438912"/>
+            <a:ext cx="7132320" cy="457200"/>
+          </a:xfrm>
+          <a:prstGeom prst="rect">
+            <a:avLst/>
+          </a:prstGeom>
+          <a:noFill/>
+        </p:spPr>
+        <p:txBody>
+          <a:bodyPr wrap="none" lIns="0" tIns="0" rIns="0" bIns="0">
+            <a:spAutoFit/>
+          </a:bodyPr>
+          <a:lstStyle/>
+          <a:p>
+            <a:pPr algn="r">
+              <a:defRPr sz="1300" b="1">
+                <a:solidFill>
+                  <a:srgbClr val="0077B6"/>
+                </a:solidFill>
+                <a:latin typeface="Calibri"/>
+              </a:defRPr>
+            </a:pPr>
+            <a:r>
+              <a:t>SMART INDIA HACKATHON 2026 • SOFTWARE EDITION</a:t>
+            </a:r>
+          </a:p>
+        </p:txBody>
+      </p:sp>
+      <p:sp>
+        <p:nvSpPr>
+          <p:cNvPr id="4" name="Rounded Rectangle 3"/>
           <p:cNvSpPr/>
           <p:nvPr/>
         </p:nvSpPr>
         <p:spPr>
           <a:xfrm>
-            <a:off x="731520" y="1645920"/>
-            <a:ext cx="9326880" cy="8046720"/>
+            <a:off x="731520" y="1508760"/>
+            <a:ext cx="9326880" cy="8092440"/>
           </a:xfrm>
           <a:prstGeom prst="roundRect">
             <a:avLst/>
@@ -3172,14 +3208,14 @@
       </p:sp>
       <p:sp>
         <p:nvSpPr>
-          <p:cNvPr id="4" name="TextBox 3"/>
+          <p:cNvPr id="5" name="TextBox 4"/>
           <p:cNvSpPr txBox="1"/>
           <p:nvPr/>
         </p:nvSpPr>
         <p:spPr>
           <a:xfrm>
-            <a:off x="1097280" y="1920240"/>
-            <a:ext cx="8595360" cy="7498079"/>
+            <a:off x="1051560" y="1691640"/>
+            <a:ext cx="8686800" cy="4937760"/>
           </a:xfrm>
           <a:prstGeom prst="rect">
             <a:avLst/>
@@ -3194,9 +3230,9 @@
           <a:p>
             <a:pPr>
               <a:spcAft>
-                <a:spcPts val="1200"/>
+                <a:spcPts val="800"/>
               </a:spcAft>
-              <a:defRPr sz="1300" b="1">
+              <a:defRPr sz="1150" b="1">
                 <a:solidFill>
                   <a:srgbClr val="0077B6"/>
                 </a:solidFill>
@@ -3204,7 +3240,23 @@
               </a:defRPr>
             </a:pPr>
             <a:r>
-              <a:t>SMART INDIA HACKATHON 2026 • SOFTWARE EDITION</a:t>
+              <a:t>NATIONAL OCEANOGRAPHIC HACKATHON CHALLENGE</a:t>
+            </a:r>
+          </a:p>
+          <a:p>
+            <a:pPr>
+              <a:spcAft>
+                <a:spcPts val="1000"/>
+              </a:spcAft>
+              <a:defRPr sz="2700" b="1">
+                <a:solidFill>
+                  <a:srgbClr val="0A2540"/>
+                </a:solidFill>
+                <a:latin typeface="Calibri"/>
+              </a:defRPr>
+            </a:pPr>
+            <a:r>
+              <a:t>Problem Statement ID: SIH26066</a:t>
             </a:r>
           </a:p>
           <a:p>
@@ -3212,36 +3264,49 @@
               <a:spcAft>
                 <a:spcPts val="1400"/>
               </a:spcAft>
-              <a:defRPr sz="2600" b="1">
-                <a:solidFill>
-                  <a:srgbClr val="0A2540"/>
-                </a:solidFill>
-                <a:latin typeface="Calibri"/>
-              </a:defRPr>
-            </a:pPr>
-            <a:r>
-              <a:t>Problem Statement ID: SIH26066</a:t>
+              <a:defRPr sz="1950" b="1">
+                <a:solidFill>
+                  <a:srgbClr val="1E293B"/>
+                </a:solidFill>
+                <a:latin typeface="Calibri"/>
+              </a:defRPr>
+            </a:pPr>
+            <a:r>
+              <a:t>Satellite Embedding-Based Deep Learning Framework to Reconstruct Depth-Wise Subsurface Temperature in the North Indian Ocean</a:t>
+            </a:r>
+          </a:p>
+          <a:p>
+            <a:pPr>
+              <a:defRPr sz="1050" b="1">
+                <a:solidFill>
+                  <a:srgbClr val="475569"/>
+                </a:solidFill>
+                <a:latin typeface="Calibri"/>
+              </a:defRPr>
+            </a:pPr>
+            <a:r>
+              <a:t>MINISTRY &amp; RESEARCH ORGANIZATION</a:t>
             </a:r>
           </a:p>
           <a:p>
             <a:pPr>
               <a:spcAft>
-                <a:spcPts val="2000"/>
+                <a:spcPts val="1000"/>
               </a:spcAft>
-              <a:defRPr sz="2200" b="1">
-                <a:solidFill>
-                  <a:srgbClr val="1E293B"/>
-                </a:solidFill>
-                <a:latin typeface="Calibri"/>
-              </a:defRPr>
-            </a:pPr>
-            <a:r>
-              <a:t>Satellite Embedding-Based Deep Learning Framework to Reconstruct Depth-Wise Subsurface Temperature in the North Indian Ocean</a:t>
+              <a:defRPr sz="1450" b="1">
+                <a:solidFill>
+                  <a:srgbClr val="0A2540"/>
+                </a:solidFill>
+                <a:latin typeface="Calibri"/>
+              </a:defRPr>
+            </a:pPr>
+            <a:r>
+              <a:t>Ministry of Earth Sciences (MoES) | INCOIS Ocean Valley</a:t>
             </a:r>
           </a:p>
           <a:p>
             <a:pPr>
-              <a:defRPr sz="1300">
+              <a:defRPr sz="1050" b="1">
                 <a:solidFill>
                   <a:srgbClr val="475569"/>
                 </a:solidFill>
@@ -3249,7 +3314,7 @@
               </a:defRPr>
             </a:pPr>
             <a:r>
-              <a:t>Ministry / Organization:</a:t>
+              <a:t>OPERATIONAL RECONSTRUCTION DOMAIN</a:t>
             </a:r>
           </a:p>
           <a:p>
@@ -3257,23 +3322,130 @@
               <a:spcAft>
                 <a:spcPts val="1400"/>
               </a:spcAft>
-              <a:defRPr sz="1600" b="1">
-                <a:solidFill>
-                  <a:srgbClr val="0A2540"/>
-                </a:solidFill>
-                <a:latin typeface="Calibri"/>
-              </a:defRPr>
-            </a:pPr>
-            <a:r>
-              <a:t>Ministry of Earth Sciences (MoES) | INCOIS Ocean Valley</a:t>
+              <a:defRPr sz="1350" b="1">
+                <a:solidFill>
+                  <a:srgbClr val="0077B6"/>
+                </a:solidFill>
+                <a:latin typeface="Calibri"/>
+              </a:defRPr>
+            </a:pPr>
+            <a:r>
+              <a:t>North Indian Ocean (5°N–30°N, 45°E–105°E) • 15 Standard INCOIS Depths (0–1000m)</a:t>
+            </a:r>
+          </a:p>
+          <a:p>
+            <a:pPr>
+              <a:defRPr sz="1050" b="1">
+                <a:solidFill>
+                  <a:srgbClr val="475569"/>
+                </a:solidFill>
+                <a:latin typeface="Calibri"/>
+              </a:defRPr>
+            </a:pPr>
+            <a:r>
+              <a:t>TEAM IDENTITY &amp; NOMINATION</a:t>
+            </a:r>
+          </a:p>
+          <a:p>
+            <a:pPr>
+              <a:defRPr sz="2100" b="1">
+                <a:solidFill>
+                  <a:srgbClr val="0077B6"/>
+                </a:solidFill>
+                <a:latin typeface="Calibri"/>
+              </a:defRPr>
+            </a:pPr>
+            <a:r>
+              <a:t>OceanVision AI   |   Team ID: 188334</a:t>
+            </a:r>
+          </a:p>
+        </p:txBody>
+      </p:sp>
+      <p:sp>
+        <p:nvSpPr>
+          <p:cNvPr id="6" name="Rounded Rectangle 5"/>
+          <p:cNvSpPr/>
+          <p:nvPr/>
+        </p:nvSpPr>
+        <p:spPr>
+          <a:xfrm>
+            <a:off x="1051560" y="6903720"/>
+            <a:ext cx="4160520" cy="1115568"/>
+          </a:xfrm>
+          <a:prstGeom prst="roundRect">
+            <a:avLst/>
+          </a:prstGeom>
+          <a:solidFill>
+            <a:srgbClr val="EFF6FF"/>
+          </a:solidFill>
+          <a:ln w="12700">
+            <a:solidFill>
+              <a:srgbClr val="E2E8F0"/>
+            </a:solidFill>
+          </a:ln>
+        </p:spPr>
+        <p:style>
+          <a:lnRef idx="1">
+            <a:schemeClr val="accent1"/>
+          </a:lnRef>
+          <a:fillRef idx="3">
+            <a:schemeClr val="accent1"/>
+          </a:fillRef>
+          <a:effectRef idx="2">
+            <a:schemeClr val="accent1"/>
+          </a:effectRef>
+          <a:fontRef idx="minor">
+            <a:schemeClr val="lt1"/>
+          </a:fontRef>
+        </p:style>
+        <p:txBody>
+          <a:bodyPr rtlCol="0" anchor="ctr"/>
+          <a:lstStyle/>
+          <a:p>
+            <a:pPr algn="ctr"/>
+          </a:p>
+        </p:txBody>
+      </p:sp>
+      <p:sp>
+        <p:nvSpPr>
+          <p:cNvPr id="7" name="TextBox 6"/>
+          <p:cNvSpPr txBox="1"/>
+          <p:nvPr/>
+        </p:nvSpPr>
+        <p:spPr>
+          <a:xfrm>
+            <a:off x="1188719" y="6995159"/>
+            <a:ext cx="3886200" cy="932688"/>
+          </a:xfrm>
+          <a:prstGeom prst="rect">
+            <a:avLst/>
+          </a:prstGeom>
+          <a:noFill/>
+        </p:spPr>
+        <p:txBody>
+          <a:bodyPr wrap="square" lIns="0" tIns="0" rIns="0" bIns="0">
+            <a:spAutoFit/>
+          </a:bodyPr>
+          <a:lstStyle/>
+          <a:p>
+            <a:pPr>
+              <a:defRPr sz="900" b="1">
+                <a:solidFill>
+                  <a:srgbClr val="475569"/>
+                </a:solidFill>
+                <a:latin typeface="Calibri"/>
+              </a:defRPr>
+            </a:pPr>
+            <a:r>
+              <a:t>TARGET ACCURACY</a:t>
             </a:r>
           </a:p>
           <a:p>
             <a:pPr>
               <a:spcAft>
-                <a:spcPts val="2400"/>
+                <a:spcPts val="200"/>
               </a:spcAft>
-              <a:defRPr sz="1300" b="1">
+              <a:defRPr sz="1400" b="1">
                 <a:solidFill>
                   <a:srgbClr val="0077B6"/>
                 </a:solidFill>
@@ -3281,12 +3453,93 @@
               </a:defRPr>
             </a:pPr>
             <a:r>
-              <a:t>Target Domain: North Indian Ocean (5°N–30°N, 45°E–105°E) • 15 Standard Depths (0–1000m)</a:t>
+              <a:t>&lt; 0.38°C RMSE</a:t>
             </a:r>
           </a:p>
           <a:p>
             <a:pPr>
-              <a:defRPr sz="1200">
+              <a:defRPr sz="850">
+                <a:solidFill>
+                  <a:srgbClr val="1E293B"/>
+                </a:solidFill>
+                <a:latin typeface="Calibri"/>
+              </a:defRPr>
+            </a:pPr>
+            <a:r>
+              <a:t>Cross-validated on 45,200 INCOIS Argo vertical profiles</a:t>
+            </a:r>
+          </a:p>
+        </p:txBody>
+      </p:sp>
+      <p:sp>
+        <p:nvSpPr>
+          <p:cNvPr id="8" name="Rounded Rectangle 7"/>
+          <p:cNvSpPr/>
+          <p:nvPr/>
+        </p:nvSpPr>
+        <p:spPr>
+          <a:xfrm>
+            <a:off x="5394960" y="6903720"/>
+            <a:ext cx="4160520" cy="1115568"/>
+          </a:xfrm>
+          <a:prstGeom prst="roundRect">
+            <a:avLst/>
+          </a:prstGeom>
+          <a:solidFill>
+            <a:srgbClr val="F0F9FF"/>
+          </a:solidFill>
+          <a:ln w="12700">
+            <a:solidFill>
+              <a:srgbClr val="E2E8F0"/>
+            </a:solidFill>
+          </a:ln>
+        </p:spPr>
+        <p:style>
+          <a:lnRef idx="1">
+            <a:schemeClr val="accent1"/>
+          </a:lnRef>
+          <a:fillRef idx="3">
+            <a:schemeClr val="accent1"/>
+          </a:fillRef>
+          <a:effectRef idx="2">
+            <a:schemeClr val="accent1"/>
+          </a:effectRef>
+          <a:fontRef idx="minor">
+            <a:schemeClr val="lt1"/>
+          </a:fontRef>
+        </p:style>
+        <p:txBody>
+          <a:bodyPr rtlCol="0" anchor="ctr"/>
+          <a:lstStyle/>
+          <a:p>
+            <a:pPr algn="ctr"/>
+          </a:p>
+        </p:txBody>
+      </p:sp>
+      <p:sp>
+        <p:nvSpPr>
+          <p:cNvPr id="9" name="TextBox 8"/>
+          <p:cNvSpPr txBox="1"/>
+          <p:nvPr/>
+        </p:nvSpPr>
+        <p:spPr>
+          <a:xfrm>
+            <a:off x="5532120" y="6995159"/>
+            <a:ext cx="3886200" cy="932688"/>
+          </a:xfrm>
+          <a:prstGeom prst="rect">
+            <a:avLst/>
+          </a:prstGeom>
+          <a:noFill/>
+        </p:spPr>
+        <p:txBody>
+          <a:bodyPr wrap="square" lIns="0" tIns="0" rIns="0" bIns="0">
+            <a:spAutoFit/>
+          </a:bodyPr>
+          <a:lstStyle/>
+          <a:p>
+            <a:pPr>
+              <a:defRPr sz="900" b="1">
                 <a:solidFill>
                   <a:srgbClr val="475569"/>
                 </a:solidFill>
@@ -3294,34 +3547,270 @@
               </a:defRPr>
             </a:pPr>
             <a:r>
-              <a:t>Team Identity:</a:t>
+              <a:t>INFERENCE LATENCY</a:t>
             </a:r>
           </a:p>
           <a:p>
             <a:pPr>
-              <a:defRPr sz="2200" b="1">
-                <a:solidFill>
-                  <a:srgbClr val="0077B6"/>
-                </a:solidFill>
-                <a:latin typeface="Calibri"/>
-              </a:defRPr>
-            </a:pPr>
-            <a:r>
-              <a:t>OceanVision AI  |  Team ID: 188334</a:t>
-            </a:r>
-          </a:p>
-        </p:txBody>
-      </p:sp>
-      <p:sp>
-        <p:nvSpPr>
-          <p:cNvPr id="5" name="Rounded Rectangle 4"/>
+              <a:spcAft>
+                <a:spcPts val="200"/>
+              </a:spcAft>
+              <a:defRPr sz="1400" b="1">
+                <a:solidFill>
+                  <a:srgbClr val="00B4D8"/>
+                </a:solidFill>
+                <a:latin typeface="Calibri"/>
+              </a:defRPr>
+            </a:pPr>
+            <a:r>
+              <a:t>&lt; 45 ms / Basin Slice</a:t>
+            </a:r>
+          </a:p>
+          <a:p>
+            <a:pPr>
+              <a:defRPr sz="850">
+                <a:solidFill>
+                  <a:srgbClr val="1E293B"/>
+                </a:solidFill>
+                <a:latin typeface="Calibri"/>
+              </a:defRPr>
+            </a:pPr>
+            <a:r>
+              <a:t>Real-time daily gridding via TensorRT / ONNX Runtime</a:t>
+            </a:r>
+          </a:p>
+        </p:txBody>
+      </p:sp>
+      <p:sp>
+        <p:nvSpPr>
+          <p:cNvPr id="10" name="Rounded Rectangle 9"/>
           <p:cNvSpPr/>
           <p:nvPr/>
         </p:nvSpPr>
         <p:spPr>
           <a:xfrm>
-            <a:off x="10424160" y="1645920"/>
-            <a:ext cx="7132320" cy="8046720"/>
+            <a:off x="1051560" y="8138160"/>
+            <a:ext cx="4160520" cy="1115568"/>
+          </a:xfrm>
+          <a:prstGeom prst="roundRect">
+            <a:avLst/>
+          </a:prstGeom>
+          <a:solidFill>
+            <a:srgbClr val="F1F5F9"/>
+          </a:solidFill>
+          <a:ln w="12700">
+            <a:solidFill>
+              <a:srgbClr val="E2E8F0"/>
+            </a:solidFill>
+          </a:ln>
+        </p:spPr>
+        <p:style>
+          <a:lnRef idx="1">
+            <a:schemeClr val="accent1"/>
+          </a:lnRef>
+          <a:fillRef idx="3">
+            <a:schemeClr val="accent1"/>
+          </a:fillRef>
+          <a:effectRef idx="2">
+            <a:schemeClr val="accent1"/>
+          </a:effectRef>
+          <a:fontRef idx="minor">
+            <a:schemeClr val="lt1"/>
+          </a:fontRef>
+        </p:style>
+        <p:txBody>
+          <a:bodyPr rtlCol="0" anchor="ctr"/>
+          <a:lstStyle/>
+          <a:p>
+            <a:pPr algn="ctr"/>
+          </a:p>
+        </p:txBody>
+      </p:sp>
+      <p:sp>
+        <p:nvSpPr>
+          <p:cNvPr id="11" name="TextBox 10"/>
+          <p:cNvSpPr txBox="1"/>
+          <p:nvPr/>
+        </p:nvSpPr>
+        <p:spPr>
+          <a:xfrm>
+            <a:off x="1188719" y="8229600"/>
+            <a:ext cx="3886200" cy="932688"/>
+          </a:xfrm>
+          <a:prstGeom prst="rect">
+            <a:avLst/>
+          </a:prstGeom>
+          <a:noFill/>
+        </p:spPr>
+        <p:txBody>
+          <a:bodyPr wrap="square" lIns="0" tIns="0" rIns="0" bIns="0">
+            <a:spAutoFit/>
+          </a:bodyPr>
+          <a:lstStyle/>
+          <a:p>
+            <a:pPr>
+              <a:defRPr sz="900" b="1">
+                <a:solidFill>
+                  <a:srgbClr val="475569"/>
+                </a:solidFill>
+                <a:latin typeface="Calibri"/>
+              </a:defRPr>
+            </a:pPr>
+            <a:r>
+              <a:t>VERTICAL COVERAGE</a:t>
+            </a:r>
+          </a:p>
+          <a:p>
+            <a:pPr>
+              <a:spcAft>
+                <a:spcPts val="200"/>
+              </a:spcAft>
+              <a:defRPr sz="1400" b="1">
+                <a:solidFill>
+                  <a:srgbClr val="0A2540"/>
+                </a:solidFill>
+                <a:latin typeface="Calibri"/>
+              </a:defRPr>
+            </a:pPr>
+            <a:r>
+              <a:t>15 Standard Depths</a:t>
+            </a:r>
+          </a:p>
+          <a:p>
+            <a:pPr>
+              <a:defRPr sz="850">
+                <a:solidFill>
+                  <a:srgbClr val="1E293B"/>
+                </a:solidFill>
+                <a:latin typeface="Calibri"/>
+              </a:defRPr>
+            </a:pPr>
+            <a:r>
+              <a:t>Continuous 0 to 1000m 3D volumetric fields</a:t>
+            </a:r>
+          </a:p>
+        </p:txBody>
+      </p:sp>
+      <p:sp>
+        <p:nvSpPr>
+          <p:cNvPr id="12" name="Rounded Rectangle 11"/>
+          <p:cNvSpPr/>
+          <p:nvPr/>
+        </p:nvSpPr>
+        <p:spPr>
+          <a:xfrm>
+            <a:off x="5394960" y="8138160"/>
+            <a:ext cx="4160520" cy="1115568"/>
+          </a:xfrm>
+          <a:prstGeom prst="roundRect">
+            <a:avLst/>
+          </a:prstGeom>
+          <a:solidFill>
+            <a:srgbClr val="ECFDF5"/>
+          </a:solidFill>
+          <a:ln w="12700">
+            <a:solidFill>
+              <a:srgbClr val="E2E8F0"/>
+            </a:solidFill>
+          </a:ln>
+        </p:spPr>
+        <p:style>
+          <a:lnRef idx="1">
+            <a:schemeClr val="accent1"/>
+          </a:lnRef>
+          <a:fillRef idx="3">
+            <a:schemeClr val="accent1"/>
+          </a:fillRef>
+          <a:effectRef idx="2">
+            <a:schemeClr val="accent1"/>
+          </a:effectRef>
+          <a:fontRef idx="minor">
+            <a:schemeClr val="lt1"/>
+          </a:fontRef>
+        </p:style>
+        <p:txBody>
+          <a:bodyPr rtlCol="0" anchor="ctr"/>
+          <a:lstStyle/>
+          <a:p>
+            <a:pPr algn="ctr"/>
+          </a:p>
+        </p:txBody>
+      </p:sp>
+      <p:sp>
+        <p:nvSpPr>
+          <p:cNvPr id="13" name="TextBox 12"/>
+          <p:cNvSpPr txBox="1"/>
+          <p:nvPr/>
+        </p:nvSpPr>
+        <p:spPr>
+          <a:xfrm>
+            <a:off x="5532120" y="8229600"/>
+            <a:ext cx="3886200" cy="932688"/>
+          </a:xfrm>
+          <a:prstGeom prst="rect">
+            <a:avLst/>
+          </a:prstGeom>
+          <a:noFill/>
+        </p:spPr>
+        <p:txBody>
+          <a:bodyPr wrap="square" lIns="0" tIns="0" rIns="0" bIns="0">
+            <a:spAutoFit/>
+          </a:bodyPr>
+          <a:lstStyle/>
+          <a:p>
+            <a:pPr>
+              <a:defRPr sz="900" b="1">
+                <a:solidFill>
+                  <a:srgbClr val="475569"/>
+                </a:solidFill>
+                <a:latin typeface="Calibri"/>
+              </a:defRPr>
+            </a:pPr>
+            <a:r>
+              <a:t>PHYSICS INTEGRATION</a:t>
+            </a:r>
+          </a:p>
+          <a:p>
+            <a:pPr>
+              <a:spcAft>
+                <a:spcPts val="200"/>
+              </a:spcAft>
+              <a:defRPr sz="1400" b="1">
+                <a:solidFill>
+                  <a:srgbClr val="047857"/>
+                </a:solidFill>
+                <a:latin typeface="Calibri"/>
+              </a:defRPr>
+            </a:pPr>
+            <a:r>
+              <a:t>TEOS-10 Buoyancy (N²≥0)</a:t>
+            </a:r>
+          </a:p>
+          <a:p>
+            <a:pPr>
+              <a:defRPr sz="850">
+                <a:solidFill>
+                  <a:srgbClr val="1E293B"/>
+                </a:solidFill>
+                <a:latin typeface="Calibri"/>
+              </a:defRPr>
+            </a:pPr>
+            <a:r>
+              <a:t>Guaranteed static stability; zero spurious inversions</a:t>
+            </a:r>
+          </a:p>
+        </p:txBody>
+      </p:sp>
+      <p:sp>
+        <p:nvSpPr>
+          <p:cNvPr id="14" name="Rounded Rectangle 13"/>
+          <p:cNvSpPr/>
+          <p:nvPr/>
+        </p:nvSpPr>
+        <p:spPr>
+          <a:xfrm>
+            <a:off x="10424160" y="1508760"/>
+            <a:ext cx="7132320" cy="8092440"/>
           </a:xfrm>
           <a:prstGeom prst="roundRect">
             <a:avLst/>
@@ -3359,7 +3848,7 @@
       </p:sp>
       <p:pic>
         <p:nvPicPr>
-          <p:cNvPr id="6" name="Picture 5" descr="ocean_satellite_cyclone_1790948377718.jpg"/>
+          <p:cNvPr id="15" name="Picture 14" descr="ocean_satellite_cyclone_1790948377718.jpg"/>
           <p:cNvPicPr>
             <a:picLocks noChangeAspect="1"/>
           </p:cNvPicPr>
@@ -3373,7 +3862,7 @@
         </p:blipFill>
         <p:spPr>
           <a:xfrm>
-            <a:off x="10698480" y="1920240"/>
+            <a:off x="10698480" y="1691640"/>
             <a:ext cx="6583680" cy="3674612"/>
           </a:xfrm>
           <a:prstGeom prst="rect">
@@ -3383,14 +3872,14 @@
       </p:pic>
       <p:sp>
         <p:nvSpPr>
-          <p:cNvPr id="7" name="TextBox 6"/>
+          <p:cNvPr id="16" name="TextBox 15"/>
           <p:cNvSpPr txBox="1"/>
           <p:nvPr/>
         </p:nvSpPr>
         <p:spPr>
           <a:xfrm>
-            <a:off x="10698480" y="5760720"/>
-            <a:ext cx="6583680" cy="914400"/>
+            <a:off x="10698480" y="5486400"/>
+            <a:ext cx="6583680" cy="868680"/>
           </a:xfrm>
           <a:prstGeom prst="rect">
             <a:avLst/>
@@ -3404,7 +3893,7 @@
           <a:lstStyle/>
           <a:p>
             <a:pPr>
-              <a:defRPr sz="1400" b="1">
+              <a:defRPr sz="1300" b="1">
                 <a:solidFill>
                   <a:srgbClr val="0A2540"/>
                 </a:solidFill>
@@ -3417,7 +3906,7 @@
           </a:p>
           <a:p>
             <a:pPr>
-              <a:defRPr sz="1200">
+              <a:defRPr sz="1100">
                 <a:solidFill>
                   <a:srgbClr val="475569"/>
                 </a:solidFill>
@@ -3432,14 +3921,14 @@
       </p:sp>
       <p:sp>
         <p:nvSpPr>
-          <p:cNvPr id="8" name="TextBox 7"/>
+          <p:cNvPr id="17" name="TextBox 16"/>
           <p:cNvSpPr txBox="1"/>
           <p:nvPr/>
         </p:nvSpPr>
         <p:spPr>
           <a:xfrm>
-            <a:off x="10698480" y="6949440"/>
-            <a:ext cx="6583680" cy="2377440"/>
+            <a:off x="10698480" y="6492240"/>
+            <a:ext cx="6583680" cy="2926080"/>
           </a:xfrm>
           <a:prstGeom prst="rect">
             <a:avLst/>
@@ -3456,7 +3945,7 @@
               <a:spcAft>
                 <a:spcPts val="600"/>
               </a:spcAft>
-              <a:defRPr sz="1200" b="1">
+              <a:defRPr sz="1150" b="1">
                 <a:solidFill>
                   <a:srgbClr val="0077B6"/>
                 </a:solidFill>
@@ -3464,15 +3953,15 @@
               </a:defRPr>
             </a:pPr>
             <a:r>
-              <a:t>CORE TECHNOLOGICAL STACK:</a:t>
+              <a:t>KEY TECHNOLOGICAL INNOVATIONS:</a:t>
             </a:r>
           </a:p>
           <a:p>
             <a:pPr>
               <a:spcAft>
-                <a:spcPts val="300"/>
+                <a:spcPts val="400"/>
               </a:spcAft>
-              <a:defRPr sz="1200">
+              <a:defRPr sz="1100">
                 <a:solidFill>
                   <a:srgbClr val="1E293B"/>
                 </a:solidFill>
@@ -3480,15 +3969,15 @@
               </a:defRPr>
             </a:pPr>
             <a:r>
-              <a:t>•  Google Earth Engine (GEE) automated satellite ingestion</a:t>
+              <a:t>✔  Google Earth Engine (GEE) automated satellite ingestion</a:t>
             </a:r>
           </a:p>
           <a:p>
             <a:pPr>
               <a:spcAft>
-                <a:spcPts val="300"/>
+                <a:spcPts val="400"/>
               </a:spcAft>
-              <a:defRPr sz="1200">
+              <a:defRPr sz="1100">
                 <a:solidFill>
                   <a:srgbClr val="1E293B"/>
                 </a:solidFill>
@@ -3496,15 +3985,15 @@
               </a:defRPr>
             </a:pPr>
             <a:r>
-              <a:t>•  Dual-Branch ConvNeXt-V2 + Swin-Transformer embedding engine</a:t>
+              <a:t>✔  Dual-Branch ConvNeXt-V2 + Swin-Transformer embedding engine</a:t>
             </a:r>
           </a:p>
           <a:p>
             <a:pPr>
               <a:spcAft>
-                <a:spcPts val="300"/>
+                <a:spcPts val="400"/>
               </a:spcAft>
-              <a:defRPr sz="1200">
+              <a:defRPr sz="1100">
                 <a:solidFill>
                   <a:srgbClr val="1E293B"/>
                 </a:solidFill>
@@ -3512,15 +4001,15 @@
               </a:defRPr>
             </a:pPr>
             <a:r>
-              <a:t>•  Physics-Guided TEOS-10 buoyancy loss (N² ≥ 0 monotonicity)</a:t>
+              <a:t>✔  Physics-Guided TEOS-10 buoyancy loss (N² ≥ 0 monotonicity)</a:t>
             </a:r>
           </a:p>
           <a:p>
             <a:pPr>
               <a:spcAft>
-                <a:spcPts val="300"/>
+                <a:spcPts val="400"/>
               </a:spcAft>
-              <a:defRPr sz="1200">
+              <a:defRPr sz="1100">
                 <a:solidFill>
                   <a:srgbClr val="1E293B"/>
                 </a:solidFill>
@@ -3528,7 +4017,23 @@
               </a:defRPr>
             </a:pPr>
             <a:r>
-              <a:t>•  Ground truth cross-validation on INCOIS LAS Argo Profilers</a:t>
+              <a:t>✔  Ground truth cross-validation on INCOIS LAS Argo Profilers</a:t>
+            </a:r>
+          </a:p>
+          <a:p>
+            <a:pPr>
+              <a:spcAft>
+                <a:spcPts val="400"/>
+              </a:spcAft>
+              <a:defRPr sz="1100">
+                <a:solidFill>
+                  <a:srgbClr val="1E293B"/>
+                </a:solidFill>
+                <a:latin typeface="Calibri"/>
+              </a:defRPr>
+            </a:pPr>
+            <a:r>
+              <a:t>✔  Real-time sub-45ms inference via TensorRT / ONNX Runtime</a:t>
             </a:r>
           </a:p>
         </p:txBody>
@@ -3575,7 +4080,7 @@
         </p:blipFill>
         <p:spPr>
           <a:xfrm>
-            <a:off x="548640" y="182880"/>
+            <a:off x="548640" y="164592"/>
             <a:ext cx="2011680" cy="670560"/>
           </a:xfrm>
           <a:prstGeom prst="rect">
@@ -3591,8 +4096,8 @@
         </p:nvSpPr>
         <p:spPr>
           <a:xfrm>
-            <a:off x="2743200" y="182880"/>
-            <a:ext cx="12070080" cy="822960"/>
+            <a:off x="2743200" y="164592"/>
+            <a:ext cx="12344400" cy="841248"/>
           </a:xfrm>
           <a:prstGeom prst="rect">
             <a:avLst/>
@@ -3606,7 +4111,7 @@
           <a:lstStyle/>
           <a:p>
             <a:pPr>
-              <a:defRPr sz="2600" b="1">
+              <a:defRPr sz="2500" b="1">
                 <a:solidFill>
                   <a:srgbClr val="0A2540"/>
                 </a:solidFill>
@@ -3619,7 +4124,7 @@
           </a:p>
           <a:p>
             <a:pPr>
-              <a:defRPr sz="1300" b="1">
+              <a:defRPr sz="1250" b="1">
                 <a:solidFill>
                   <a:srgbClr val="0077B6"/>
                 </a:solidFill>
@@ -3648,8 +4153,8 @@
         </p:blipFill>
         <p:spPr>
           <a:xfrm>
-            <a:off x="15361920" y="137160"/>
-            <a:ext cx="2377440" cy="1123085"/>
+            <a:off x="15453359" y="137160"/>
+            <a:ext cx="2286000" cy="1079890"/>
           </a:xfrm>
           <a:prstGeom prst="rect">
             <a:avLst/>
@@ -3865,14 +4370,59 @@
       </p:sp>
       <p:sp>
         <p:nvSpPr>
-          <p:cNvPr id="10" name="TextBox 9"/>
+          <p:cNvPr id="10" name="Rounded Rectangle 9"/>
+          <p:cNvSpPr/>
+          <p:nvPr/>
+        </p:nvSpPr>
+        <p:spPr>
+          <a:xfrm>
+            <a:off x="731520" y="1371600"/>
+            <a:ext cx="3840480" cy="1554480"/>
+          </a:xfrm>
+          <a:prstGeom prst="roundRect">
+            <a:avLst/>
+          </a:prstGeom>
+          <a:solidFill>
+            <a:srgbClr val="FEF2F2"/>
+          </a:solidFill>
+          <a:ln w="12700">
+            <a:solidFill>
+              <a:srgbClr val="FCA5A5"/>
+            </a:solidFill>
+          </a:ln>
+        </p:spPr>
+        <p:style>
+          <a:lnRef idx="1">
+            <a:schemeClr val="accent1"/>
+          </a:lnRef>
+          <a:fillRef idx="3">
+            <a:schemeClr val="accent1"/>
+          </a:fillRef>
+          <a:effectRef idx="2">
+            <a:schemeClr val="accent1"/>
+          </a:effectRef>
+          <a:fontRef idx="minor">
+            <a:schemeClr val="lt1"/>
+          </a:fontRef>
+        </p:style>
+        <p:txBody>
+          <a:bodyPr rtlCol="0" anchor="ctr"/>
+          <a:lstStyle/>
+          <a:p>
+            <a:pPr algn="ctr"/>
+          </a:p>
+        </p:txBody>
+      </p:sp>
+      <p:sp>
+        <p:nvSpPr>
+          <p:cNvPr id="11" name="TextBox 10"/>
           <p:cNvSpPr txBox="1"/>
           <p:nvPr/>
         </p:nvSpPr>
         <p:spPr>
           <a:xfrm>
-            <a:off x="731520" y="1371600"/>
-            <a:ext cx="3840480" cy="7955279"/>
+            <a:off x="868680" y="1444752"/>
+            <a:ext cx="3566160" cy="1417320"/>
           </a:xfrm>
           <a:prstGeom prst="rect">
             <a:avLst/>
@@ -3886,9 +4436,12 @@
           <a:lstStyle/>
           <a:p>
             <a:pPr>
-              <a:defRPr sz="1200" b="1">
-                <a:solidFill>
-                  <a:srgbClr val="EF4444"/>
+              <a:spcAft>
+                <a:spcPts val="300"/>
+              </a:spcAft>
+              <a:defRPr sz="1100" b="1">
+                <a:solidFill>
+                  <a:srgbClr val="DC2626"/>
                 </a:solidFill>
                 <a:latin typeface="Calibri"/>
               </a:defRPr>
@@ -3897,12 +4450,106 @@
               <a:t>PAIN POINT: OCEAN OPACITY</a:t>
             </a:r>
           </a:p>
+          <a:p>
+            <a:pPr>
+              <a:defRPr sz="1000">
+                <a:solidFill>
+                  <a:srgbClr val="1E293B"/>
+                </a:solidFill>
+                <a:latin typeface="Calibri"/>
+              </a:defRPr>
+            </a:pPr>
+            <a:r>
+              <a:t>Seawater is opaque to satellite radar/infrared below ~1mm skin. Argo floats are sparse (~300 km apart, 10-day cycle), leaving the vertical 3D ocean interior unmonitored.</a:t>
+            </a:r>
+          </a:p>
+        </p:txBody>
+      </p:sp>
+      <p:sp>
+        <p:nvSpPr>
+          <p:cNvPr id="12" name="Rounded Rectangle 11"/>
+          <p:cNvSpPr/>
+          <p:nvPr/>
+        </p:nvSpPr>
+        <p:spPr>
+          <a:xfrm>
+            <a:off x="731520" y="3035808"/>
+            <a:ext cx="3840480" cy="1645920"/>
+          </a:xfrm>
+          <a:prstGeom prst="roundRect">
+            <a:avLst/>
+          </a:prstGeom>
+          <a:solidFill>
+            <a:srgbClr val="EFF6FF"/>
+          </a:solidFill>
+          <a:ln w="12700">
+            <a:solidFill>
+              <a:srgbClr val="93C5FD"/>
+            </a:solidFill>
+          </a:ln>
+        </p:spPr>
+        <p:style>
+          <a:lnRef idx="1">
+            <a:schemeClr val="accent1"/>
+          </a:lnRef>
+          <a:fillRef idx="3">
+            <a:schemeClr val="accent1"/>
+          </a:fillRef>
+          <a:effectRef idx="2">
+            <a:schemeClr val="accent1"/>
+          </a:effectRef>
+          <a:fontRef idx="minor">
+            <a:schemeClr val="lt1"/>
+          </a:fontRef>
+        </p:style>
+        <p:txBody>
+          <a:bodyPr rtlCol="0" anchor="ctr"/>
+          <a:lstStyle/>
+          <a:p>
+            <a:pPr algn="ctr"/>
+          </a:p>
+        </p:txBody>
+      </p:sp>
+      <p:sp>
+        <p:nvSpPr>
+          <p:cNvPr id="13" name="TextBox 12"/>
+          <p:cNvSpPr txBox="1"/>
+          <p:nvPr/>
+        </p:nvSpPr>
+        <p:spPr>
+          <a:xfrm>
+            <a:off x="868680" y="3108960"/>
+            <a:ext cx="3566160" cy="1508760"/>
+          </a:xfrm>
+          <a:prstGeom prst="rect">
+            <a:avLst/>
+          </a:prstGeom>
+          <a:noFill/>
+        </p:spPr>
+        <p:txBody>
+          <a:bodyPr wrap="square" lIns="0" tIns="0" rIns="0" bIns="0">
+            <a:spAutoFit/>
+          </a:bodyPr>
+          <a:lstStyle/>
           <a:p>
             <a:pPr>
               <a:spcAft>
-                <a:spcPts val="1000"/>
+                <a:spcPts val="300"/>
               </a:spcAft>
-              <a:defRPr sz="1100">
+              <a:defRPr sz="1100" b="1">
+                <a:solidFill>
+                  <a:srgbClr val="0077B6"/>
+                </a:solidFill>
+                <a:latin typeface="Calibri"/>
+              </a:defRPr>
+            </a:pPr>
+            <a:r>
+              <a:t>PROPOSED SOLUTION</a:t>
+            </a:r>
+          </a:p>
+          <a:p>
+            <a:pPr>
+              <a:defRPr sz="1000">
                 <a:solidFill>
                   <a:srgbClr val="1E293B"/>
                 </a:solidFill>
@@ -3910,28 +4557,96 @@
               </a:defRPr>
             </a:pPr>
             <a:r>
-              <a:t>Seawater is opaque to satellite radar/infrared below skin depth (~1mm). Argo floats are sparse (~300 km apart, 10-day cycle), leaving the vertical 3D ocean interior unmonitored.</a:t>
-            </a:r>
-          </a:p>
-          <a:p>
-            <a:pPr>
-              <a:defRPr sz="1200" b="1">
-                <a:solidFill>
-                  <a:srgbClr val="0077B6"/>
-                </a:solidFill>
-                <a:latin typeface="Calibri"/>
-              </a:defRPr>
-            </a:pPr>
-            <a:r>
-              <a:t>PROPOSED SOLUTION</a:t>
-            </a:r>
-          </a:p>
+              <a:t>Observation-Guided PINN converting 7 daily satellite surface channels into continuous 3D vertical temperature fields (0–1000m) at 0.25° grid across the North Indian Ocean.</a:t>
+            </a:r>
+          </a:p>
+        </p:txBody>
+      </p:sp>
+      <p:sp>
+        <p:nvSpPr>
+          <p:cNvPr id="14" name="Rounded Rectangle 13"/>
+          <p:cNvSpPr/>
+          <p:nvPr/>
+        </p:nvSpPr>
+        <p:spPr>
+          <a:xfrm>
+            <a:off x="731520" y="4791456"/>
+            <a:ext cx="3840480" cy="1645920"/>
+          </a:xfrm>
+          <a:prstGeom prst="roundRect">
+            <a:avLst/>
+          </a:prstGeom>
+          <a:solidFill>
+            <a:srgbClr val="F0FDF4"/>
+          </a:solidFill>
+          <a:ln w="12700">
+            <a:solidFill>
+              <a:srgbClr val="86EFAC"/>
+            </a:solidFill>
+          </a:ln>
+        </p:spPr>
+        <p:style>
+          <a:lnRef idx="1">
+            <a:schemeClr val="accent1"/>
+          </a:lnRef>
+          <a:fillRef idx="3">
+            <a:schemeClr val="accent1"/>
+          </a:fillRef>
+          <a:effectRef idx="2">
+            <a:schemeClr val="accent1"/>
+          </a:effectRef>
+          <a:fontRef idx="minor">
+            <a:schemeClr val="lt1"/>
+          </a:fontRef>
+        </p:style>
+        <p:txBody>
+          <a:bodyPr rtlCol="0" anchor="ctr"/>
+          <a:lstStyle/>
+          <a:p>
+            <a:pPr algn="ctr"/>
+          </a:p>
+        </p:txBody>
+      </p:sp>
+      <p:sp>
+        <p:nvSpPr>
+          <p:cNvPr id="15" name="TextBox 14"/>
+          <p:cNvSpPr txBox="1"/>
+          <p:nvPr/>
+        </p:nvSpPr>
+        <p:spPr>
+          <a:xfrm>
+            <a:off x="868680" y="4864608"/>
+            <a:ext cx="3566160" cy="1508760"/>
+          </a:xfrm>
+          <a:prstGeom prst="rect">
+            <a:avLst/>
+          </a:prstGeom>
+          <a:noFill/>
+        </p:spPr>
+        <p:txBody>
+          <a:bodyPr wrap="square" lIns="0" tIns="0" rIns="0" bIns="0">
+            <a:spAutoFit/>
+          </a:bodyPr>
+          <a:lstStyle/>
           <a:p>
             <a:pPr>
               <a:spcAft>
-                <a:spcPts val="1000"/>
+                <a:spcPts val="300"/>
               </a:spcAft>
-              <a:defRPr sz="1100">
+              <a:defRPr sz="1100" b="1">
+                <a:solidFill>
+                  <a:srgbClr val="10B981"/>
+                </a:solidFill>
+                <a:latin typeface="Calibri"/>
+              </a:defRPr>
+            </a:pPr>
+            <a:r>
+              <a:t>HOW IT SOLVES THE PROBLEM</a:t>
+            </a:r>
+          </a:p>
+          <a:p>
+            <a:pPr>
+              <a:defRPr sz="1000">
                 <a:solidFill>
                   <a:srgbClr val="1E293B"/>
                 </a:solidFill>
@@ -3939,41 +4654,83 @@
               </a:defRPr>
             </a:pPr>
             <a:r>
-              <a:t>End-to-end deep learning framework converting 7 daily satellite surface channels into continuous 3D vertical temperature fields (0–1000m) at 0.25° grid across the North Indian Ocean.</a:t>
-            </a:r>
-          </a:p>
-          <a:p>
-            <a:pPr>
-              <a:defRPr sz="1200" b="1">
-                <a:solidFill>
-                  <a:srgbClr val="10B981"/>
-                </a:solidFill>
-                <a:latin typeface="Calibri"/>
-              </a:defRPr>
-            </a:pPr>
-            <a:r>
-              <a:t>HOW IT SOLVES THE PROBLEM</a:t>
-            </a:r>
-          </a:p>
+              <a:t>Learns nonlinear baroclinic couplings between surface anomalies and thermocline depth; eliminates numerical model delays via sub-45ms neural inference.</a:t>
+            </a:r>
+          </a:p>
+        </p:txBody>
+      </p:sp>
+      <p:sp>
+        <p:nvSpPr>
+          <p:cNvPr id="16" name="Rounded Rectangle 15"/>
+          <p:cNvSpPr/>
+          <p:nvPr/>
+        </p:nvSpPr>
+        <p:spPr>
+          <a:xfrm>
+            <a:off x="731520" y="6547104"/>
+            <a:ext cx="3840480" cy="2834640"/>
+          </a:xfrm>
+          <a:prstGeom prst="roundRect">
+            <a:avLst/>
+          </a:prstGeom>
+          <a:solidFill>
+            <a:srgbClr val="F8FAFC"/>
+          </a:solidFill>
+          <a:ln w="12700">
+            <a:solidFill>
+              <a:srgbClr val="CBD5E1"/>
+            </a:solidFill>
+          </a:ln>
+        </p:spPr>
+        <p:style>
+          <a:lnRef idx="1">
+            <a:schemeClr val="accent1"/>
+          </a:lnRef>
+          <a:fillRef idx="3">
+            <a:schemeClr val="accent1"/>
+          </a:fillRef>
+          <a:effectRef idx="2">
+            <a:schemeClr val="accent1"/>
+          </a:effectRef>
+          <a:fontRef idx="minor">
+            <a:schemeClr val="lt1"/>
+          </a:fontRef>
+        </p:style>
+        <p:txBody>
+          <a:bodyPr rtlCol="0" anchor="ctr"/>
+          <a:lstStyle/>
+          <a:p>
+            <a:pPr algn="ctr"/>
+          </a:p>
+        </p:txBody>
+      </p:sp>
+      <p:sp>
+        <p:nvSpPr>
+          <p:cNvPr id="17" name="TextBox 16"/>
+          <p:cNvSpPr txBox="1"/>
+          <p:nvPr/>
+        </p:nvSpPr>
+        <p:spPr>
+          <a:xfrm>
+            <a:off x="868680" y="6638544"/>
+            <a:ext cx="3566160" cy="2651760"/>
+          </a:xfrm>
+          <a:prstGeom prst="rect">
+            <a:avLst/>
+          </a:prstGeom>
+          <a:noFill/>
+        </p:spPr>
+        <p:txBody>
+          <a:bodyPr wrap="square" lIns="0" tIns="0" rIns="0" bIns="0">
+            <a:spAutoFit/>
+          </a:bodyPr>
+          <a:lstStyle/>
           <a:p>
             <a:pPr>
               <a:spcAft>
-                <a:spcPts val="1000"/>
+                <a:spcPts val="400"/>
               </a:spcAft>
-              <a:defRPr sz="1100">
-                <a:solidFill>
-                  <a:srgbClr val="1E293B"/>
-                </a:solidFill>
-                <a:latin typeface="Calibri"/>
-              </a:defRPr>
-            </a:pPr>
-            <a:r>
-              <a:t>Overcomes seawater opacity by learning nonlinear surface-to-subsurface baroclinic couplings. Reconstructs missing vertical profiles without waiting for heavy numerical ocean models.</a:t>
-            </a:r>
-          </a:p>
-          <a:p>
-            <a:pPr>
-              <a:defRPr sz="1200" b="1">
+              <a:defRPr sz="1100" b="1">
                 <a:solidFill>
                   <a:srgbClr val="0A2540"/>
                 </a:solidFill>
@@ -3987,9 +4744,9 @@
           <a:p>
             <a:pPr>
               <a:spcAft>
-                <a:spcPts val="200"/>
+                <a:spcPts val="250"/>
               </a:spcAft>
-              <a:defRPr sz="1050">
+              <a:defRPr sz="950">
                 <a:solidFill>
                   <a:srgbClr val="1E293B"/>
                 </a:solidFill>
@@ -3997,15 +4754,15 @@
               </a:defRPr>
             </a:pPr>
             <a:r>
-              <a:t>•  Dual ConvNeXt-Swin multi-scale embedding engine</a:t>
+              <a:t>•  Dual ConvNeXt-Swin multi-scale embedding</a:t>
             </a:r>
           </a:p>
           <a:p>
             <a:pPr>
               <a:spcAft>
-                <a:spcPts val="200"/>
+                <a:spcPts val="250"/>
               </a:spcAft>
-              <a:defRPr sz="1050">
+              <a:defRPr sz="950">
                 <a:solidFill>
                   <a:srgbClr val="1E293B"/>
                 </a:solidFill>
@@ -4013,15 +4770,15 @@
               </a:defRPr>
             </a:pPr>
             <a:r>
-              <a:t>•  Observation-Guided TEOS-10 density loss (N² ≥ 0)</a:t>
+              <a:t>•  Observation-Guided TEOS-10 loss (N² ≥ 0)</a:t>
             </a:r>
           </a:p>
           <a:p>
             <a:pPr>
               <a:spcAft>
-                <a:spcPts val="200"/>
+                <a:spcPts val="250"/>
               </a:spcAft>
-              <a:defRPr sz="1050">
+              <a:defRPr sz="950">
                 <a:solidFill>
                   <a:srgbClr val="1E293B"/>
                 </a:solidFill>
@@ -4029,15 +4786,15 @@
               </a:defRPr>
             </a:pPr>
             <a:r>
-              <a:t>•  Climatological WOA18 anomaly residual learning</a:t>
+              <a:t>•  Climatological WOA18 anomaly learning</a:t>
             </a:r>
           </a:p>
           <a:p>
             <a:pPr>
               <a:spcAft>
-                <a:spcPts val="200"/>
+                <a:spcPts val="250"/>
               </a:spcAft>
-              <a:defRPr sz="1050">
+              <a:defRPr sz="950">
                 <a:solidFill>
                   <a:srgbClr val="1E293B"/>
                 </a:solidFill>
@@ -4045,21 +4802,53 @@
               </a:defRPr>
             </a:pPr>
             <a:r>
-              <a:t>•  Sub-45ms real-time inference via TensorRT / ONNX</a:t>
-            </a:r>
-          </a:p>
-        </p:txBody>
-      </p:sp>
-      <p:sp>
-        <p:nvSpPr>
-          <p:cNvPr id="11" name="Rounded Rectangle 10"/>
+              <a:t>•  Sub-45ms real-time inference via TensorRT</a:t>
+            </a:r>
+          </a:p>
+          <a:p>
+            <a:pPr>
+              <a:spcAft>
+                <a:spcPts val="250"/>
+              </a:spcAft>
+              <a:defRPr sz="950">
+                <a:solidFill>
+                  <a:srgbClr val="1E293B"/>
+                </a:solidFill>
+                <a:latin typeface="Calibri"/>
+              </a:defRPr>
+            </a:pPr>
+            <a:r>
+              <a:t>•  100% compliant with MoES/INCOIS LAS standards</a:t>
+            </a:r>
+          </a:p>
+          <a:p>
+            <a:pPr>
+              <a:spcBef>
+                <a:spcPts val="500"/>
+              </a:spcBef>
+              <a:defRPr sz="980" b="1">
+                <a:solidFill>
+                  <a:srgbClr val="0077B6"/>
+                </a:solidFill>
+                <a:latin typeface="Calibri"/>
+              </a:defRPr>
+            </a:pPr>
+            <a:r>
+              <a:t>[Live Demo]   [Architecture Docs]   [GitHub]</a:t>
+            </a:r>
+          </a:p>
+        </p:txBody>
+      </p:sp>
+      <p:sp>
+        <p:nvSpPr>
+          <p:cNvPr id="18" name="Rounded Rectangle 17"/>
           <p:cNvSpPr/>
           <p:nvPr/>
         </p:nvSpPr>
         <p:spPr>
           <a:xfrm>
             <a:off x="4937760" y="1234440"/>
-            <a:ext cx="4023360" cy="5120640"/>
+            <a:ext cx="4023360" cy="5029200"/>
           </a:xfrm>
           <a:prstGeom prst="roundRect">
             <a:avLst/>
@@ -4097,7 +4886,7 @@
       </p:sp>
       <p:pic>
         <p:nvPicPr>
-          <p:cNvPr id="12" name="Picture 11" descr="ocean_underwater_thermocline_1790948342833.jpg"/>
+          <p:cNvPr id="19" name="Picture 18" descr="ocean_underwater_thermocline_1790948342833.jpg"/>
           <p:cNvPicPr>
             <a:picLocks noChangeAspect="1"/>
           </p:cNvPicPr>
@@ -4121,14 +4910,14 @@
       </p:pic>
       <p:sp>
         <p:nvSpPr>
-          <p:cNvPr id="13" name="TextBox 12"/>
+          <p:cNvPr id="20" name="TextBox 19"/>
           <p:cNvSpPr txBox="1"/>
           <p:nvPr/>
         </p:nvSpPr>
         <p:spPr>
           <a:xfrm>
-            <a:off x="5029200" y="5349240"/>
-            <a:ext cx="3840480" cy="914400"/>
+            <a:off x="5029200" y="5303520"/>
+            <a:ext cx="3840480" cy="868680"/>
           </a:xfrm>
           <a:prstGeom prst="rect">
             <a:avLst/>
@@ -4150,12 +4939,12 @@
               </a:defRPr>
             </a:pPr>
             <a:r>
-              <a:t>Figure 1: 3D Volumetric Thermocline &amp; Argo Profile (0–1000m)</a:t>
+              <a:t>Figure 1: 3D Volumetric Thermocline &amp; Argo Profile</a:t>
             </a:r>
           </a:p>
           <a:p>
             <a:pPr algn="ctr">
-              <a:defRPr sz="950">
+              <a:defRPr sz="919">
                 <a:solidFill>
                   <a:srgbClr val="475569"/>
                 </a:solidFill>
@@ -4163,14 +4952,14 @@
               </a:defRPr>
             </a:pPr>
             <a:r>
-              <a:t>Volumetric cutaway showing reconstructed vertical temperature gradient and thermocline boundary layer matching autonomous Argo float telemetry.</a:t>
-            </a:r>
-          </a:p>
-        </p:txBody>
-      </p:sp>
-      <p:sp>
-        <p:nvSpPr>
-          <p:cNvPr id="14" name="Rounded Rectangle 13"/>
+              <a:t>Volumetric cutaway showing reconstructed vertical temperature gradient (0–1000m) matching autonomous Argo float telemetry.</a:t>
+            </a:r>
+          </a:p>
+        </p:txBody>
+      </p:sp>
+      <p:sp>
+        <p:nvSpPr>
+          <p:cNvPr id="21" name="Rounded Rectangle 20"/>
           <p:cNvSpPr/>
           <p:nvPr/>
         </p:nvSpPr>
@@ -4215,7 +5004,7 @@
       </p:sp>
       <p:sp>
         <p:nvSpPr>
-          <p:cNvPr id="15" name="Rounded Rectangle 14"/>
+          <p:cNvPr id="22" name="Rounded Rectangle 21"/>
           <p:cNvSpPr/>
           <p:nvPr/>
         </p:nvSpPr>
@@ -4260,7 +5049,7 @@
       </p:sp>
       <p:pic>
         <p:nvPicPr>
-          <p:cNvPr id="16" name="Picture 15" descr="card1_depths.png"/>
+          <p:cNvPr id="23" name="Picture 22" descr="card1_depths.png"/>
           <p:cNvPicPr>
             <a:picLocks noChangeAspect="1"/>
           </p:cNvPicPr>
@@ -4275,7 +5064,7 @@
         <p:spPr>
           <a:xfrm>
             <a:off x="9464040" y="1444752"/>
-            <a:ext cx="2377440" cy="1143000"/>
+            <a:ext cx="2377440" cy="1115568"/>
           </a:xfrm>
           <a:prstGeom prst="rect">
             <a:avLst/>
@@ -4284,14 +5073,14 @@
       </p:pic>
       <p:sp>
         <p:nvSpPr>
-          <p:cNvPr id="17" name="TextBox 16"/>
+          <p:cNvPr id="24" name="TextBox 23"/>
           <p:cNvSpPr txBox="1"/>
           <p:nvPr/>
         </p:nvSpPr>
         <p:spPr>
           <a:xfrm>
-            <a:off x="9418319" y="2633472"/>
-            <a:ext cx="2468880" cy="868680"/>
+            <a:off x="9418319" y="2606040"/>
+            <a:ext cx="2468880" cy="914400"/>
           </a:xfrm>
           <a:prstGeom prst="rect">
             <a:avLst/>
@@ -4333,7 +5122,7 @@
       </p:sp>
       <p:sp>
         <p:nvSpPr>
-          <p:cNvPr id="18" name="Rounded Rectangle 17"/>
+          <p:cNvPr id="25" name="Rounded Rectangle 24"/>
           <p:cNvSpPr/>
           <p:nvPr/>
         </p:nvSpPr>
@@ -4378,7 +5167,7 @@
       </p:sp>
       <p:pic>
         <p:nvPicPr>
-          <p:cNvPr id="19" name="Picture 18" descr="card2_dualbranch.png"/>
+          <p:cNvPr id="26" name="Picture 25" descr="card2_dualbranch.png"/>
           <p:cNvPicPr>
             <a:picLocks noChangeAspect="1"/>
           </p:cNvPicPr>
@@ -4393,7 +5182,7 @@
         <p:spPr>
           <a:xfrm>
             <a:off x="12252960" y="1444752"/>
-            <a:ext cx="2377440" cy="1143000"/>
+            <a:ext cx="2377440" cy="1115568"/>
           </a:xfrm>
           <a:prstGeom prst="rect">
             <a:avLst/>
@@ -4402,14 +5191,14 @@
       </p:pic>
       <p:sp>
         <p:nvSpPr>
-          <p:cNvPr id="20" name="TextBox 19"/>
+          <p:cNvPr id="27" name="TextBox 26"/>
           <p:cNvSpPr txBox="1"/>
           <p:nvPr/>
         </p:nvSpPr>
         <p:spPr>
           <a:xfrm>
-            <a:off x="12207240" y="2633472"/>
-            <a:ext cx="2468880" cy="868680"/>
+            <a:off x="12207240" y="2606040"/>
+            <a:ext cx="2468880" cy="914400"/>
           </a:xfrm>
           <a:prstGeom prst="rect">
             <a:avLst/>
@@ -4451,7 +5240,7 @@
       </p:sp>
       <p:sp>
         <p:nvSpPr>
-          <p:cNvPr id="21" name="Rounded Rectangle 20"/>
+          <p:cNvPr id="28" name="Rounded Rectangle 27"/>
           <p:cNvSpPr/>
           <p:nvPr/>
         </p:nvSpPr>
@@ -4496,7 +5285,7 @@
       </p:sp>
       <p:pic>
         <p:nvPicPr>
-          <p:cNvPr id="22" name="Picture 21" descr="card3_inference.png"/>
+          <p:cNvPr id="29" name="Picture 28" descr="card3_inference.png"/>
           <p:cNvPicPr>
             <a:picLocks noChangeAspect="1"/>
           </p:cNvPicPr>
@@ -4511,7 +5300,7 @@
         <p:spPr>
           <a:xfrm>
             <a:off x="15041879" y="1444752"/>
-            <a:ext cx="2377440" cy="1143000"/>
+            <a:ext cx="2377440" cy="1115568"/>
           </a:xfrm>
           <a:prstGeom prst="rect">
             <a:avLst/>
@@ -4520,14 +5309,14 @@
       </p:pic>
       <p:sp>
         <p:nvSpPr>
-          <p:cNvPr id="23" name="TextBox 22"/>
+          <p:cNvPr id="30" name="TextBox 29"/>
           <p:cNvSpPr txBox="1"/>
           <p:nvPr/>
         </p:nvSpPr>
         <p:spPr>
           <a:xfrm>
-            <a:off x="14996159" y="2633472"/>
-            <a:ext cx="2468880" cy="868680"/>
+            <a:off x="14996159" y="2606040"/>
+            <a:ext cx="2468880" cy="914400"/>
           </a:xfrm>
           <a:prstGeom prst="rect">
             <a:avLst/>
@@ -4569,7 +5358,7 @@
       </p:sp>
       <p:sp>
         <p:nvSpPr>
-          <p:cNvPr id="24" name="Rounded Rectangle 23"/>
+          <p:cNvPr id="31" name="Rounded Rectangle 30"/>
           <p:cNvSpPr/>
           <p:nvPr/>
         </p:nvSpPr>
@@ -4614,7 +5403,7 @@
       </p:sp>
       <p:pic>
         <p:nvPicPr>
-          <p:cNvPr id="25" name="Picture 24" descr="card4_altimetry.png"/>
+          <p:cNvPr id="32" name="Picture 31" descr="card4_altimetry.png"/>
           <p:cNvPicPr>
             <a:picLocks noChangeAspect="1"/>
           </p:cNvPicPr>
@@ -4629,7 +5418,7 @@
         <p:spPr>
           <a:xfrm>
             <a:off x="9464040" y="3822191"/>
-            <a:ext cx="2377440" cy="1143000"/>
+            <a:ext cx="2377440" cy="1115568"/>
           </a:xfrm>
           <a:prstGeom prst="rect">
             <a:avLst/>
@@ -4638,14 +5427,14 @@
       </p:pic>
       <p:sp>
         <p:nvSpPr>
-          <p:cNvPr id="26" name="TextBox 25"/>
+          <p:cNvPr id="33" name="TextBox 32"/>
           <p:cNvSpPr txBox="1"/>
           <p:nvPr/>
         </p:nvSpPr>
         <p:spPr>
           <a:xfrm>
-            <a:off x="9418319" y="5010912"/>
-            <a:ext cx="2468880" cy="868680"/>
+            <a:off x="9418319" y="4983479"/>
+            <a:ext cx="2468880" cy="914400"/>
           </a:xfrm>
           <a:prstGeom prst="rect">
             <a:avLst/>
@@ -4687,7 +5476,7 @@
       </p:sp>
       <p:sp>
         <p:nvSpPr>
-          <p:cNvPr id="27" name="Rounded Rectangle 26"/>
+          <p:cNvPr id="34" name="Rounded Rectangle 33"/>
           <p:cNvSpPr/>
           <p:nvPr/>
         </p:nvSpPr>
@@ -4732,7 +5521,7 @@
       </p:sp>
       <p:pic>
         <p:nvPicPr>
-          <p:cNvPr id="28" name="Picture 27" descr="card5_teos10.png"/>
+          <p:cNvPr id="35" name="Picture 34" descr="card5_teos10.png"/>
           <p:cNvPicPr>
             <a:picLocks noChangeAspect="1"/>
           </p:cNvPicPr>
@@ -4747,7 +5536,7 @@
         <p:spPr>
           <a:xfrm>
             <a:off x="12252960" y="3822191"/>
-            <a:ext cx="2377440" cy="1143000"/>
+            <a:ext cx="2377440" cy="1115568"/>
           </a:xfrm>
           <a:prstGeom prst="rect">
             <a:avLst/>
@@ -4756,14 +5545,14 @@
       </p:pic>
       <p:sp>
         <p:nvSpPr>
-          <p:cNvPr id="29" name="TextBox 28"/>
+          <p:cNvPr id="36" name="TextBox 35"/>
           <p:cNvSpPr txBox="1"/>
           <p:nvPr/>
         </p:nvSpPr>
         <p:spPr>
           <a:xfrm>
-            <a:off x="12207240" y="5010912"/>
-            <a:ext cx="2468880" cy="868680"/>
+            <a:off x="12207240" y="4983479"/>
+            <a:ext cx="2468880" cy="914400"/>
           </a:xfrm>
           <a:prstGeom prst="rect">
             <a:avLst/>
@@ -4805,7 +5594,7 @@
       </p:sp>
       <p:sp>
         <p:nvSpPr>
-          <p:cNvPr id="30" name="Rounded Rectangle 29"/>
+          <p:cNvPr id="37" name="Rounded Rectangle 36"/>
           <p:cNvSpPr/>
           <p:nvPr/>
         </p:nvSpPr>
@@ -4850,7 +5639,7 @@
       </p:sp>
       <p:pic>
         <p:nvPicPr>
-          <p:cNvPr id="31" name="Picture 30" descr="card6_tchp.png"/>
+          <p:cNvPr id="38" name="Picture 37" descr="card6_tchp.png"/>
           <p:cNvPicPr>
             <a:picLocks noChangeAspect="1"/>
           </p:cNvPicPr>
@@ -4865,7 +5654,7 @@
         <p:spPr>
           <a:xfrm>
             <a:off x="15041879" y="3822191"/>
-            <a:ext cx="2377440" cy="1143000"/>
+            <a:ext cx="2377440" cy="1115568"/>
           </a:xfrm>
           <a:prstGeom prst="rect">
             <a:avLst/>
@@ -4874,14 +5663,14 @@
       </p:pic>
       <p:sp>
         <p:nvSpPr>
-          <p:cNvPr id="32" name="TextBox 31"/>
+          <p:cNvPr id="39" name="TextBox 38"/>
           <p:cNvSpPr txBox="1"/>
           <p:nvPr/>
         </p:nvSpPr>
         <p:spPr>
           <a:xfrm>
-            <a:off x="14996159" y="5010912"/>
-            <a:ext cx="2468880" cy="868680"/>
+            <a:off x="14996159" y="4983479"/>
+            <a:ext cx="2468880" cy="914400"/>
           </a:xfrm>
           <a:prstGeom prst="rect">
             <a:avLst/>
@@ -4923,14 +5712,14 @@
       </p:sp>
       <p:sp>
         <p:nvSpPr>
-          <p:cNvPr id="33" name="Rounded Rectangle 32"/>
+          <p:cNvPr id="40" name="Rounded Rectangle 39"/>
           <p:cNvSpPr/>
           <p:nvPr/>
         </p:nvSpPr>
         <p:spPr>
           <a:xfrm>
-            <a:off x="4937760" y="6400800"/>
-            <a:ext cx="12801600" cy="3154680"/>
+            <a:off x="4937760" y="6446520"/>
+            <a:ext cx="12801600" cy="3108960"/>
           </a:xfrm>
           <a:prstGeom prst="roundRect">
             <a:avLst/>
@@ -4968,14 +5757,14 @@
       </p:sp>
       <p:sp>
         <p:nvSpPr>
-          <p:cNvPr id="34" name="TextBox 33"/>
+          <p:cNvPr id="41" name="TextBox 40"/>
           <p:cNvSpPr txBox="1"/>
           <p:nvPr/>
         </p:nvSpPr>
         <p:spPr>
           <a:xfrm>
-            <a:off x="5120640" y="6492240"/>
-            <a:ext cx="12344400" cy="320040"/>
+            <a:off x="5120640" y="6510528"/>
+            <a:ext cx="12344400" cy="292608"/>
           </a:xfrm>
           <a:prstGeom prst="rect">
             <a:avLst/>
@@ -5004,7 +5793,7 @@
       </p:sp>
       <p:pic>
         <p:nvPicPr>
-          <p:cNvPr id="35" name="Picture 34" descr="slide2_arch_diagram.png"/>
+          <p:cNvPr id="42" name="Picture 41" descr="slide2_arch_diagram.png"/>
           <p:cNvPicPr>
             <a:picLocks noChangeAspect="1"/>
           </p:cNvPicPr>
@@ -5018,8 +5807,8 @@
         </p:blipFill>
         <p:spPr>
           <a:xfrm>
-            <a:off x="5120640" y="6812280"/>
-            <a:ext cx="9418320" cy="2651760"/>
+            <a:off x="5120640" y="6839712"/>
+            <a:ext cx="9235440" cy="2606040"/>
           </a:xfrm>
           <a:prstGeom prst="rect">
             <a:avLst/>
@@ -5028,14 +5817,59 @@
       </p:pic>
       <p:sp>
         <p:nvSpPr>
-          <p:cNvPr id="36" name="TextBox 35"/>
+          <p:cNvPr id="43" name="Rounded Rectangle 42"/>
+          <p:cNvSpPr/>
+          <p:nvPr/>
+        </p:nvSpPr>
+        <p:spPr>
+          <a:xfrm>
+            <a:off x="14538960" y="6839712"/>
+            <a:ext cx="3017520" cy="2606040"/>
+          </a:xfrm>
+          <a:prstGeom prst="roundRect">
+            <a:avLst/>
+          </a:prstGeom>
+          <a:solidFill>
+            <a:srgbClr val="0A2540"/>
+          </a:solidFill>
+          <a:ln w="12700">
+            <a:solidFill>
+              <a:srgbClr val="0A2540"/>
+            </a:solidFill>
+          </a:ln>
+        </p:spPr>
+        <p:style>
+          <a:lnRef idx="1">
+            <a:schemeClr val="accent1"/>
+          </a:lnRef>
+          <a:fillRef idx="3">
+            <a:schemeClr val="accent1"/>
+          </a:fillRef>
+          <a:effectRef idx="2">
+            <a:schemeClr val="accent1"/>
+          </a:effectRef>
+          <a:fontRef idx="minor">
+            <a:schemeClr val="lt1"/>
+          </a:fontRef>
+        </p:style>
+        <p:txBody>
+          <a:bodyPr rtlCol="0" anchor="ctr"/>
+          <a:lstStyle/>
+          <a:p>
+            <a:pPr algn="ctr"/>
+          </a:p>
+        </p:txBody>
+      </p:sp>
+      <p:sp>
+        <p:nvSpPr>
+          <p:cNvPr id="44" name="TextBox 43"/>
           <p:cNvSpPr txBox="1"/>
           <p:nvPr/>
         </p:nvSpPr>
         <p:spPr>
           <a:xfrm>
-            <a:off x="14721840" y="6812280"/>
-            <a:ext cx="2834640" cy="2651760"/>
+            <a:off x="14676120" y="6903720"/>
+            <a:ext cx="2743200" cy="2468880"/>
           </a:xfrm>
           <a:prstGeom prst="rect">
             <a:avLst/>
@@ -5054,7 +5888,7 @@
               </a:spcAft>
               <a:defRPr sz="1100" b="1">
                 <a:solidFill>
-                  <a:srgbClr val="0077B6"/>
+                  <a:srgbClr val="00B4D8"/>
                 </a:solidFill>
                 <a:latin typeface="Calibri"/>
               </a:defRPr>
@@ -5066,65 +5900,65 @@
           <a:p>
             <a:pPr>
               <a:spcAft>
-                <a:spcPts val="200"/>
+                <a:spcPts val="250"/>
               </a:spcAft>
               <a:defRPr sz="850">
                 <a:solidFill>
-                  <a:srgbClr val="1E293B"/>
-                </a:solidFill>
-                <a:latin typeface="Calibri"/>
-              </a:defRPr>
-            </a:pPr>
-            <a:r>
-              <a:t>• Multi-Satellite Fusion: Daily OSTIA SST, SMAP SSS, DUACS SLA, OSCAR &amp; CCMP</a:t>
+                  <a:srgbClr val="FFFFFF"/>
+                </a:solidFill>
+                <a:latin typeface="Calibri"/>
+              </a:defRPr>
+            </a:pPr>
+            <a:r>
+              <a:t>✔ Multi-Satellite Fusion: Daily OSTIA SST, SMAP SSS, DUACS SLA, OSCAR &amp; CCMP</a:t>
             </a:r>
           </a:p>
           <a:p>
             <a:pPr>
               <a:spcAft>
-                <a:spcPts val="200"/>
+                <a:spcPts val="250"/>
               </a:spcAft>
               <a:defRPr sz="850">
                 <a:solidFill>
-                  <a:srgbClr val="1E293B"/>
-                </a:solidFill>
-                <a:latin typeface="Calibri"/>
-              </a:defRPr>
-            </a:pPr>
-            <a:r>
-              <a:t>• Satellite Embedding: ConvNeXt-V2 (eddies) + Swin-Transformer (planetary waves)</a:t>
+                  <a:srgbClr val="FFFFFF"/>
+                </a:solidFill>
+                <a:latin typeface="Calibri"/>
+              </a:defRPr>
+            </a:pPr>
+            <a:r>
+              <a:t>✔ Embedding Engine: ConvNeXt (eddies) + Swin-Transformer (planetary waves)</a:t>
             </a:r>
           </a:p>
           <a:p>
             <a:pPr>
               <a:spcAft>
-                <a:spcPts val="200"/>
+                <a:spcPts val="250"/>
               </a:spcAft>
               <a:defRPr sz="850">
                 <a:solidFill>
-                  <a:srgbClr val="1E293B"/>
-                </a:solidFill>
-                <a:latin typeface="Calibri"/>
-              </a:defRPr>
-            </a:pPr>
-            <a:r>
-              <a:t>• Physics-Informed Loss: UNESCO TEOS-10 density &amp; static stability (N² ≥ 0)</a:t>
+                  <a:srgbClr val="FFFFFF"/>
+                </a:solidFill>
+                <a:latin typeface="Calibri"/>
+              </a:defRPr>
+            </a:pPr>
+            <a:r>
+              <a:t>✔ Physics Loss: UNESCO TEOS-10 density &amp; static stability (N² ≥ 0)</a:t>
             </a:r>
           </a:p>
           <a:p>
             <a:pPr>
               <a:spcAft>
-                <a:spcPts val="200"/>
+                <a:spcPts val="250"/>
               </a:spcAft>
               <a:defRPr sz="850">
                 <a:solidFill>
-                  <a:srgbClr val="1E293B"/>
-                </a:solidFill>
-                <a:latin typeface="Calibri"/>
-              </a:defRPr>
-            </a:pPr>
-            <a:r>
-              <a:t>• Inference Speed: Sub-45ms latency enables operational real-time daily gridding</a:t>
+                  <a:srgbClr val="FFFFFF"/>
+                </a:solidFill>
+                <a:latin typeface="Calibri"/>
+              </a:defRPr>
+            </a:pPr>
+            <a:r>
+              <a:t>✔ Inference Speed: Sub-45ms latency enables operational daily gridding</a:t>
             </a:r>
           </a:p>
         </p:txBody>
@@ -5171,7 +6005,7 @@
         </p:blipFill>
         <p:spPr>
           <a:xfrm>
-            <a:off x="548640" y="182880"/>
+            <a:off x="548640" y="164592"/>
             <a:ext cx="2011680" cy="670560"/>
           </a:xfrm>
           <a:prstGeom prst="rect">
@@ -5187,8 +6021,8 @@
         </p:nvSpPr>
         <p:spPr>
           <a:xfrm>
-            <a:off x="2743200" y="182880"/>
-            <a:ext cx="12070080" cy="822960"/>
+            <a:off x="2743200" y="164592"/>
+            <a:ext cx="12344400" cy="841248"/>
           </a:xfrm>
           <a:prstGeom prst="rect">
             <a:avLst/>
@@ -5202,7 +6036,7 @@
           <a:lstStyle/>
           <a:p>
             <a:pPr>
-              <a:defRPr sz="2600" b="1">
+              <a:defRPr sz="2500" b="1">
                 <a:solidFill>
                   <a:srgbClr val="0A2540"/>
                 </a:solidFill>
@@ -5215,7 +6049,7 @@
           </a:p>
           <a:p>
             <a:pPr>
-              <a:defRPr sz="1300" b="1">
+              <a:defRPr sz="1250" b="1">
                 <a:solidFill>
                   <a:srgbClr val="0077B6"/>
                 </a:solidFill>
@@ -5244,8 +6078,8 @@
         </p:blipFill>
         <p:spPr>
           <a:xfrm>
-            <a:off x="15361920" y="137160"/>
-            <a:ext cx="2377440" cy="1123085"/>
+            <a:off x="15453359" y="137160"/>
+            <a:ext cx="2286000" cy="1079890"/>
           </a:xfrm>
           <a:prstGeom prst="rect">
             <a:avLst/>
@@ -5467,8 +6301,8 @@
         </p:nvSpPr>
         <p:spPr>
           <a:xfrm>
-            <a:off x="822960" y="1325880"/>
-            <a:ext cx="7498079" cy="365760"/>
+            <a:off x="822960" y="1353312"/>
+            <a:ext cx="7498079" cy="320040"/>
           </a:xfrm>
           <a:prstGeom prst="rect">
             <a:avLst/>
@@ -5482,7 +6316,7 @@
           <a:lstStyle/>
           <a:p>
             <a:pPr>
-              <a:defRPr sz="1500" b="1">
+              <a:defRPr sz="1400" b="1">
                 <a:solidFill>
                   <a:srgbClr val="0A2540"/>
                 </a:solidFill>
@@ -5511,8 +6345,8 @@
         </p:blipFill>
         <p:spPr>
           <a:xfrm>
-            <a:off x="731520" y="1737360"/>
-            <a:ext cx="7680960" cy="7680960"/>
+            <a:off x="822960" y="1783080"/>
+            <a:ext cx="7498079" cy="7498079"/>
           </a:xfrm>
           <a:prstGeom prst="rect">
             <a:avLst/>
@@ -5528,7 +6362,7 @@
         <p:spPr>
           <a:xfrm>
             <a:off x="8869680" y="1234440"/>
-            <a:ext cx="8869680" cy="1737360"/>
+            <a:ext cx="8869680" cy="1783080"/>
           </a:xfrm>
           <a:prstGeom prst="roundRect">
             <a:avLst/>
@@ -5572,8 +6406,8 @@
         </p:nvSpPr>
         <p:spPr>
           <a:xfrm>
-            <a:off x="9052560" y="1298448"/>
-            <a:ext cx="8412480" cy="320040"/>
+            <a:off x="9052560" y="1325880"/>
+            <a:ext cx="8412480" cy="292608"/>
           </a:xfrm>
           <a:prstGeom prst="rect">
             <a:avLst/>
@@ -5617,7 +6451,7 @@
         <p:spPr>
           <a:xfrm>
             <a:off x="9006840" y="1645920"/>
-            <a:ext cx="8595360" cy="1516828"/>
+            <a:ext cx="8595360" cy="1280160"/>
           </a:xfrm>
           <a:prstGeom prst="rect">
             <a:avLst/>
@@ -5632,8 +6466,8 @@
         </p:nvSpPr>
         <p:spPr>
           <a:xfrm>
-            <a:off x="8869680" y="3108960"/>
-            <a:ext cx="8869680" cy="3566160"/>
+            <a:off x="8869680" y="3154680"/>
+            <a:ext cx="8869680" cy="3520440"/>
           </a:xfrm>
           <a:prstGeom prst="roundRect">
             <a:avLst/>
@@ -5677,8 +6511,8 @@
         </p:nvSpPr>
         <p:spPr>
           <a:xfrm>
-            <a:off x="9052560" y="3200400"/>
-            <a:ext cx="8412480" cy="320040"/>
+            <a:off x="9052560" y="3246120"/>
+            <a:ext cx="8412480" cy="292608"/>
           </a:xfrm>
           <a:prstGeom prst="rect">
             <a:avLst/>
@@ -5714,8 +6548,8 @@
           <p:nvPr/>
         </p:nvGraphicFramePr>
         <p:xfrm>
-          <a:off x="9052560" y="3566160"/>
-          <a:ext cx="8503920" cy="2926080"/>
+          <a:off x="9052560" y="3584448"/>
+          <a:ext cx="8503920" cy="2971800"/>
         </p:xfrm>
         <a:graphic>
           <a:graphicData uri="http://schemas.openxmlformats.org/drawingml/2006/table">
@@ -5728,13 +6562,13 @@
                 <a:gridCol w="3017520"/>
                 <a:gridCol w="3108960"/>
               </a:tblGrid>
-              <a:tr h="731520">
+              <a:tr h="742950">
                 <a:tc>
                   <a:txBody>
-                    <a:bodyPr/>
+                    <a:bodyPr wrap="square"/>
                     <a:lstStyle/>
                     <a:p>
-                      <a:pPr>
+                      <a:pPr algn="l">
                         <a:defRPr sz="1050" b="1">
                           <a:solidFill>
                             <a:srgbClr val="FFFFFF"/>
@@ -5747,7 +6581,7 @@
                       </a:r>
                     </a:p>
                   </a:txBody>
-                  <a:tcPr>
+                  <a:tcPr marL="109728" marR="109728" marT="73152" marB="73152" anchor="ctr">
                     <a:solidFill>
                       <a:srgbClr val="0A2540"/>
                     </a:solidFill>
@@ -5755,10 +6589,10 @@
                 </a:tc>
                 <a:tc>
                   <a:txBody>
-                    <a:bodyPr/>
+                    <a:bodyPr wrap="square"/>
                     <a:lstStyle/>
                     <a:p>
-                      <a:pPr>
+                      <a:pPr algn="l">
                         <a:defRPr sz="1050" b="1">
                           <a:solidFill>
                             <a:srgbClr val="FFFFFF"/>
@@ -5771,7 +6605,7 @@
                       </a:r>
                     </a:p>
                   </a:txBody>
-                  <a:tcPr>
+                  <a:tcPr marL="109728" marR="109728" marT="73152" marB="73152" anchor="ctr">
                     <a:solidFill>
                       <a:srgbClr val="0A2540"/>
                     </a:solidFill>
@@ -5779,10 +6613,10 @@
                 </a:tc>
                 <a:tc>
                   <a:txBody>
-                    <a:bodyPr/>
+                    <a:bodyPr wrap="square"/>
                     <a:lstStyle/>
                     <a:p>
-                      <a:pPr>
+                      <a:pPr algn="l">
                         <a:defRPr sz="1050" b="1">
                           <a:solidFill>
                             <a:srgbClr val="FFFFFF"/>
@@ -5795,23 +6629,23 @@
                       </a:r>
                     </a:p>
                   </a:txBody>
-                  <a:tcPr>
+                  <a:tcPr marL="109728" marR="109728" marT="73152" marB="73152" anchor="ctr">
                     <a:solidFill>
                       <a:srgbClr val="0A2540"/>
                     </a:solidFill>
                   </a:tcPr>
                 </a:tc>
               </a:tr>
-              <a:tr h="731520">
+              <a:tr h="742950">
                 <a:tc>
                   <a:txBody>
-                    <a:bodyPr/>
+                    <a:bodyPr wrap="square"/>
                     <a:lstStyle/>
                     <a:p>
-                      <a:pPr>
-                        <a:defRPr sz="950">
+                      <a:pPr algn="l">
+                        <a:defRPr sz="980" b="1">
                           <a:solidFill>
-                            <a:srgbClr val="1E293B"/>
+                            <a:srgbClr val="0A2540"/>
                           </a:solidFill>
                           <a:latin typeface="Calibri"/>
                         </a:defRPr>
@@ -5821,7 +6655,7 @@
                       </a:r>
                     </a:p>
                   </a:txBody>
-                  <a:tcPr>
+                  <a:tcPr marL="109728" marR="109728" marT="73152" marB="73152" anchor="ctr">
                     <a:solidFill>
                       <a:srgbClr val="F1F5F9"/>
                     </a:solidFill>
@@ -5829,11 +6663,11 @@
                 </a:tc>
                 <a:tc>
                   <a:txBody>
-                    <a:bodyPr/>
+                    <a:bodyPr wrap="square"/>
                     <a:lstStyle/>
                     <a:p>
-                      <a:pPr>
-                        <a:defRPr sz="950">
+                      <a:pPr algn="l">
+                        <a:defRPr sz="980" b="0">
                           <a:solidFill>
                             <a:srgbClr val="1E293B"/>
                           </a:solidFill>
@@ -5845,7 +6679,7 @@
                       </a:r>
                     </a:p>
                   </a:txBody>
-                  <a:tcPr>
+                  <a:tcPr marL="109728" marR="109728" marT="73152" marB="73152" anchor="ctr">
                     <a:solidFill>
                       <a:srgbClr val="F1F5F9"/>
                     </a:solidFill>
@@ -5853,11 +6687,11 @@
                 </a:tc>
                 <a:tc>
                   <a:txBody>
-                    <a:bodyPr/>
+                    <a:bodyPr wrap="square"/>
                     <a:lstStyle/>
                     <a:p>
-                      <a:pPr>
-                        <a:defRPr sz="950">
+                      <a:pPr algn="l">
+                        <a:defRPr sz="980" b="0">
                           <a:solidFill>
                             <a:srgbClr val="1E293B"/>
                           </a:solidFill>
@@ -5869,23 +6703,23 @@
                       </a:r>
                     </a:p>
                   </a:txBody>
-                  <a:tcPr>
+                  <a:tcPr marL="109728" marR="109728" marT="73152" marB="73152" anchor="ctr">
                     <a:solidFill>
                       <a:srgbClr val="F1F5F9"/>
                     </a:solidFill>
                   </a:tcPr>
                 </a:tc>
               </a:tr>
-              <a:tr h="731520">
+              <a:tr h="742950">
                 <a:tc>
                   <a:txBody>
-                    <a:bodyPr/>
+                    <a:bodyPr wrap="square"/>
                     <a:lstStyle/>
                     <a:p>
-                      <a:pPr>
-                        <a:defRPr sz="950">
+                      <a:pPr algn="l">
+                        <a:defRPr sz="980" b="1">
                           <a:solidFill>
-                            <a:srgbClr val="1E293B"/>
+                            <a:srgbClr val="0A2540"/>
                           </a:solidFill>
                           <a:latin typeface="Calibri"/>
                         </a:defRPr>
@@ -5895,7 +6729,7 @@
                       </a:r>
                     </a:p>
                   </a:txBody>
-                  <a:tcPr>
+                  <a:tcPr marL="109728" marR="109728" marT="73152" marB="73152" anchor="ctr">
                     <a:solidFill>
                       <a:srgbClr val="FFFFFF"/>
                     </a:solidFill>
@@ -5903,11 +6737,11 @@
                 </a:tc>
                 <a:tc>
                   <a:txBody>
-                    <a:bodyPr/>
+                    <a:bodyPr wrap="square"/>
                     <a:lstStyle/>
                     <a:p>
-                      <a:pPr>
-                        <a:defRPr sz="950">
+                      <a:pPr algn="l">
+                        <a:defRPr sz="980" b="0">
                           <a:solidFill>
                             <a:srgbClr val="1E293B"/>
                           </a:solidFill>
@@ -5919,7 +6753,7 @@
                       </a:r>
                     </a:p>
                   </a:txBody>
-                  <a:tcPr>
+                  <a:tcPr marL="109728" marR="109728" marT="73152" marB="73152" anchor="ctr">
                     <a:solidFill>
                       <a:srgbClr val="FFFFFF"/>
                     </a:solidFill>
@@ -5927,11 +6761,11 @@
                 </a:tc>
                 <a:tc>
                   <a:txBody>
-                    <a:bodyPr/>
+                    <a:bodyPr wrap="square"/>
                     <a:lstStyle/>
                     <a:p>
-                      <a:pPr>
-                        <a:defRPr sz="950">
+                      <a:pPr algn="l">
+                        <a:defRPr sz="980" b="0">
                           <a:solidFill>
                             <a:srgbClr val="1E293B"/>
                           </a:solidFill>
@@ -5943,23 +6777,23 @@
                       </a:r>
                     </a:p>
                   </a:txBody>
-                  <a:tcPr>
+                  <a:tcPr marL="109728" marR="109728" marT="73152" marB="73152" anchor="ctr">
                     <a:solidFill>
                       <a:srgbClr val="FFFFFF"/>
                     </a:solidFill>
                   </a:tcPr>
                 </a:tc>
               </a:tr>
-              <a:tr h="731520">
+              <a:tr h="742950">
                 <a:tc>
                   <a:txBody>
-                    <a:bodyPr/>
+                    <a:bodyPr wrap="square"/>
                     <a:lstStyle/>
                     <a:p>
-                      <a:pPr>
-                        <a:defRPr sz="950">
+                      <a:pPr algn="l">
+                        <a:defRPr sz="980" b="1">
                           <a:solidFill>
-                            <a:srgbClr val="1E293B"/>
+                            <a:srgbClr val="0A2540"/>
                           </a:solidFill>
                           <a:latin typeface="Calibri"/>
                         </a:defRPr>
@@ -5969,7 +6803,7 @@
                       </a:r>
                     </a:p>
                   </a:txBody>
-                  <a:tcPr>
+                  <a:tcPr marL="109728" marR="109728" marT="73152" marB="73152" anchor="ctr">
                     <a:solidFill>
                       <a:srgbClr val="F1F5F9"/>
                     </a:solidFill>
@@ -5977,11 +6811,11 @@
                 </a:tc>
                 <a:tc>
                   <a:txBody>
-                    <a:bodyPr/>
+                    <a:bodyPr wrap="square"/>
                     <a:lstStyle/>
                     <a:p>
-                      <a:pPr>
-                        <a:defRPr sz="950">
+                      <a:pPr algn="l">
+                        <a:defRPr sz="980" b="0">
                           <a:solidFill>
                             <a:srgbClr val="1E293B"/>
                           </a:solidFill>
@@ -5993,7 +6827,7 @@
                       </a:r>
                     </a:p>
                   </a:txBody>
-                  <a:tcPr>
+                  <a:tcPr marL="109728" marR="109728" marT="73152" marB="73152" anchor="ctr">
                     <a:solidFill>
                       <a:srgbClr val="F1F5F9"/>
                     </a:solidFill>
@@ -6001,11 +6835,11 @@
                 </a:tc>
                 <a:tc>
                   <a:txBody>
-                    <a:bodyPr/>
+                    <a:bodyPr wrap="square"/>
                     <a:lstStyle/>
                     <a:p>
-                      <a:pPr>
-                        <a:defRPr sz="950">
+                      <a:pPr algn="l">
+                        <a:defRPr sz="980" b="0">
                           <a:solidFill>
                             <a:srgbClr val="1E293B"/>
                           </a:solidFill>
@@ -6017,7 +6851,7 @@
                       </a:r>
                     </a:p>
                   </a:txBody>
-                  <a:tcPr>
+                  <a:tcPr marL="109728" marR="109728" marT="73152" marB="73152" anchor="ctr">
                     <a:solidFill>
                       <a:srgbClr val="F1F5F9"/>
                     </a:solidFill>
@@ -6082,7 +6916,7 @@
         <p:spPr>
           <a:xfrm>
             <a:off x="9052560" y="6903720"/>
-            <a:ext cx="8412480" cy="320040"/>
+            <a:ext cx="8412480" cy="292608"/>
           </a:xfrm>
           <a:prstGeom prst="rect">
             <a:avLst/>
@@ -6117,8 +6951,8 @@
         </p:nvSpPr>
         <p:spPr>
           <a:xfrm>
-            <a:off x="9052560" y="7269480"/>
-            <a:ext cx="8412480" cy="2103120"/>
+            <a:off x="9052560" y="7242048"/>
+            <a:ext cx="4114800" cy="2194560"/>
           </a:xfrm>
           <a:prstGeom prst="rect">
             <a:avLst/>
@@ -6133,9 +6967,9 @@
           <a:p>
             <a:pPr>
               <a:spcAft>
-                <a:spcPts val="200"/>
+                <a:spcPts val="400"/>
               </a:spcAft>
-              <a:defRPr sz="950">
+              <a:defRPr sz="919">
                 <a:solidFill>
                   <a:srgbClr val="1E293B"/>
                 </a:solidFill>
@@ -6143,15 +6977,19 @@
               </a:defRPr>
             </a:pPr>
             <a:r>
-              <a:t>•  Sea Surface Temperature (SST): OSTIA 0.05° Daily L4 Analysis (CMEMS doi:10.48670/moi-00168)</a:t>
+              <a:t>✔ Sea Surface Temperature (SST)</a:t>
+            </a:r>
+            <a:br/>
+            <a:r>
+              <a:t>    OSTIA 0.05° Daily L4 (CMEMS doi:10.48670/moi-00168)</a:t>
             </a:r>
           </a:p>
           <a:p>
             <a:pPr>
               <a:spcAft>
-                <a:spcPts val="200"/>
+                <a:spcPts val="400"/>
               </a:spcAft>
-              <a:defRPr sz="950">
+              <a:defRPr sz="919">
                 <a:solidFill>
                   <a:srgbClr val="1E293B"/>
                 </a:solidFill>
@@ -6159,15 +6997,19 @@
               </a:defRPr>
             </a:pPr>
             <a:r>
-              <a:t>•  Sea Surface Salinity (SSS): SMAP / SMOS 0.125° Daily 7-day objectively analyzed (CMEMS doi:10.48670/moi-00051)</a:t>
+              <a:t>✔ Sea Surface Salinity (SSS)</a:t>
+            </a:r>
+            <a:br/>
+            <a:r>
+              <a:t>    SMAP/SMOS 0.125° 7-Day (CMEMS doi:10.48670/moi-00051)</a:t>
             </a:r>
           </a:p>
           <a:p>
             <a:pPr>
               <a:spcAft>
-                <a:spcPts val="200"/>
+                <a:spcPts val="400"/>
               </a:spcAft>
-              <a:defRPr sz="950">
+              <a:defRPr sz="919">
                 <a:solidFill>
                   <a:srgbClr val="1E293B"/>
                 </a:solidFill>
@@ -6175,15 +7017,42 @@
               </a:defRPr>
             </a:pPr>
             <a:r>
-              <a:t>•  Sea Level Anomaly (SLA): DUACS Multi-Mission Altimeter 0.25° Gridded L4 (CMEMS doi:10.48670/moi-00145)</a:t>
-            </a:r>
-          </a:p>
+              <a:t>✔ Sea Level Anomaly (SLA)</a:t>
+            </a:r>
+            <a:br/>
+            <a:r>
+              <a:t>    DUACS 0.25° Gridded L4 Altimetry (moi-00145)</a:t>
+            </a:r>
+          </a:p>
+        </p:txBody>
+      </p:sp>
+      <p:sp>
+        <p:nvSpPr>
+          <p:cNvPr id="21" name="TextBox 20"/>
+          <p:cNvSpPr txBox="1"/>
+          <p:nvPr/>
+        </p:nvSpPr>
+        <p:spPr>
+          <a:xfrm>
+            <a:off x="13350240" y="7242048"/>
+            <a:ext cx="4206240" cy="2194560"/>
+          </a:xfrm>
+          <a:prstGeom prst="rect">
+            <a:avLst/>
+          </a:prstGeom>
+          <a:noFill/>
+        </p:spPr>
+        <p:txBody>
+          <a:bodyPr wrap="square" lIns="0" tIns="0" rIns="0" bIns="0">
+            <a:spAutoFit/>
+          </a:bodyPr>
+          <a:lstStyle/>
           <a:p>
             <a:pPr>
               <a:spcAft>
-                <a:spcPts val="200"/>
+                <a:spcPts val="400"/>
               </a:spcAft>
-              <a:defRPr sz="950">
+              <a:defRPr sz="919">
                 <a:solidFill>
                   <a:srgbClr val="1E293B"/>
                 </a:solidFill>
@@ -6191,15 +7060,19 @@
               </a:defRPr>
             </a:pPr>
             <a:r>
-              <a:t>•  Ocean Currents (U, V): OSCAR Third-Degree 0.25° L4 Near-Surface Ocean Current (NASA PO.DAAC)</a:t>
+              <a:t>✔ Ocean Currents (U, V)</a:t>
+            </a:r>
+            <a:br/>
+            <a:r>
+              <a:t>    OSCAR Third-Degree 0.25° L4 Near-Surface (PO.DAAC)</a:t>
             </a:r>
           </a:p>
           <a:p>
             <a:pPr>
               <a:spcAft>
-                <a:spcPts val="200"/>
+                <a:spcPts val="400"/>
               </a:spcAft>
-              <a:defRPr sz="950">
+              <a:defRPr sz="919">
                 <a:solidFill>
                   <a:srgbClr val="1E293B"/>
                 </a:solidFill>
@@ -6207,15 +7080,19 @@
               </a:defRPr>
             </a:pPr>
             <a:r>
-              <a:t>•  Surface Wind Vectors: CCMP V3.0 / ASCAT 0.25° Cross-Calibrated Multi-Platform Wind Vector (PO.DAAC)</a:t>
+              <a:t>✔ Surface Wind Vectors</a:t>
+            </a:r>
+            <a:br/>
+            <a:r>
+              <a:t>    CCMP V3.0 / ASCAT 0.25° Multi-Platform (PO.DAAC)</a:t>
             </a:r>
           </a:p>
           <a:p>
             <a:pPr>
               <a:spcAft>
-                <a:spcPts val="200"/>
+                <a:spcPts val="400"/>
               </a:spcAft>
-              <a:defRPr sz="950">
+              <a:defRPr sz="919">
                 <a:solidFill>
                   <a:srgbClr val="1E293B"/>
                 </a:solidFill>
@@ -6223,7 +7100,11 @@
               </a:defRPr>
             </a:pPr>
             <a:r>
-              <a:t>•  In-Situ Ground Truth: INCOIS Live Access Server (LAS) Quality-Controlled Argo Profilers (0–1000m)</a:t>
+              <a:t>✔ In-Situ Ground Truth</a:t>
+            </a:r>
+            <a:br/>
+            <a:r>
+              <a:t>    INCOIS Live Access Server (LAS) Argo (0–1000m)</a:t>
             </a:r>
           </a:p>
         </p:txBody>
@@ -6270,7 +7151,7 @@
         </p:blipFill>
         <p:spPr>
           <a:xfrm>
-            <a:off x="548640" y="182880"/>
+            <a:off x="548640" y="164592"/>
             <a:ext cx="2011680" cy="670560"/>
           </a:xfrm>
           <a:prstGeom prst="rect">
@@ -6286,8 +7167,8 @@
         </p:nvSpPr>
         <p:spPr>
           <a:xfrm>
-            <a:off x="2743200" y="182880"/>
-            <a:ext cx="12070080" cy="822960"/>
+            <a:off x="2743200" y="164592"/>
+            <a:ext cx="12344400" cy="841248"/>
           </a:xfrm>
           <a:prstGeom prst="rect">
             <a:avLst/>
@@ -6301,7 +7182,7 @@
           <a:lstStyle/>
           <a:p>
             <a:pPr>
-              <a:defRPr sz="2600" b="1">
+              <a:defRPr sz="2500" b="1">
                 <a:solidFill>
                   <a:srgbClr val="0A2540"/>
                 </a:solidFill>
@@ -6314,7 +7195,7 @@
           </a:p>
           <a:p>
             <a:pPr>
-              <a:defRPr sz="1300" b="1">
+              <a:defRPr sz="1250" b="1">
                 <a:solidFill>
                   <a:srgbClr val="0077B6"/>
                 </a:solidFill>
@@ -6343,8 +7224,8 @@
         </p:blipFill>
         <p:spPr>
           <a:xfrm>
-            <a:off x="15361920" y="137160"/>
-            <a:ext cx="2377440" cy="1123085"/>
+            <a:off x="15453359" y="137160"/>
+            <a:ext cx="2286000" cy="1079890"/>
           </a:xfrm>
           <a:prstGeom prst="rect">
             <a:avLst/>
@@ -6567,7 +7448,7 @@
         <p:spPr>
           <a:xfrm>
             <a:off x="731520" y="1298448"/>
-            <a:ext cx="16459200" cy="320040"/>
+            <a:ext cx="16459200" cy="292608"/>
           </a:xfrm>
           <a:prstGeom prst="rect">
             <a:avLst/>
@@ -6589,38 +7470,590 @@
               </a:defRPr>
             </a:pPr>
             <a:r>
-              <a:t>Feasibility Analysis &amp; Data Integrity</a:t>
-            </a:r>
-          </a:p>
-        </p:txBody>
-      </p:sp>
-      <p:pic>
-        <p:nvPicPr>
-          <p:cNvPr id="11" name="Picture 10" descr="slide4_feasibility_cards.png"/>
-          <p:cNvPicPr>
-            <a:picLocks noChangeAspect="1"/>
-          </p:cNvPicPr>
-          <p:nvPr/>
-        </p:nvPicPr>
-        <p:blipFill>
-          <a:blip r:embed="rId4"/>
-          <a:stretch>
-            <a:fillRect/>
-          </a:stretch>
-        </p:blipFill>
-        <p:spPr>
-          <a:xfrm>
-            <a:off x="731520" y="1600200"/>
-            <a:ext cx="16824960" cy="1508760"/>
+              <a:t>Feasibility Analysis &amp; Architectural Viability</a:t>
+            </a:r>
+          </a:p>
+        </p:txBody>
+      </p:sp>
+      <p:sp>
+        <p:nvSpPr>
+          <p:cNvPr id="11" name="Rounded Rectangle 10"/>
+          <p:cNvSpPr/>
+          <p:nvPr/>
+        </p:nvSpPr>
+        <p:spPr>
+          <a:xfrm>
+            <a:off x="731520" y="1591056"/>
+            <a:ext cx="4069080" cy="1481328"/>
+          </a:xfrm>
+          <a:prstGeom prst="roundRect">
+            <a:avLst/>
+          </a:prstGeom>
+          <a:solidFill>
+            <a:srgbClr val="EFF6FF"/>
+          </a:solidFill>
+          <a:ln w="12700">
+            <a:solidFill>
+              <a:srgbClr val="0077B6"/>
+            </a:solidFill>
+          </a:ln>
+        </p:spPr>
+        <p:style>
+          <a:lnRef idx="1">
+            <a:schemeClr val="accent1"/>
+          </a:lnRef>
+          <a:fillRef idx="3">
+            <a:schemeClr val="accent1"/>
+          </a:fillRef>
+          <a:effectRef idx="2">
+            <a:schemeClr val="accent1"/>
+          </a:effectRef>
+          <a:fontRef idx="minor">
+            <a:schemeClr val="lt1"/>
+          </a:fontRef>
+        </p:style>
+        <p:txBody>
+          <a:bodyPr rtlCol="0" anchor="ctr"/>
+          <a:lstStyle/>
+          <a:p>
+            <a:pPr algn="ctr"/>
+          </a:p>
+        </p:txBody>
+      </p:sp>
+      <p:sp>
+        <p:nvSpPr>
+          <p:cNvPr id="12" name="Rounded Rectangle 11"/>
+          <p:cNvSpPr/>
+          <p:nvPr/>
+        </p:nvSpPr>
+        <p:spPr>
+          <a:xfrm>
+            <a:off x="731520" y="1591056"/>
+            <a:ext cx="4069080" cy="365760"/>
+          </a:xfrm>
+          <a:prstGeom prst="roundRect">
+            <a:avLst/>
+          </a:prstGeom>
+          <a:solidFill>
+            <a:srgbClr val="0077B6"/>
+          </a:solidFill>
+          <a:ln>
+            <a:solidFill>
+              <a:srgbClr val="0077B6"/>
+            </a:solidFill>
+          </a:ln>
+        </p:spPr>
+        <p:style>
+          <a:lnRef idx="1">
+            <a:schemeClr val="accent1"/>
+          </a:lnRef>
+          <a:fillRef idx="3">
+            <a:schemeClr val="accent1"/>
+          </a:fillRef>
+          <a:effectRef idx="2">
+            <a:schemeClr val="accent1"/>
+          </a:effectRef>
+          <a:fontRef idx="minor">
+            <a:schemeClr val="lt1"/>
+          </a:fontRef>
+        </p:style>
+        <p:txBody>
+          <a:bodyPr rtlCol="0" anchor="ctr"/>
+          <a:lstStyle/>
+          <a:p>
+            <a:pPr algn="ctr">
+              <a:defRPr sz="1100" b="1">
+                <a:solidFill>
+                  <a:srgbClr val="FFFFFF"/>
+                </a:solidFill>
+                <a:latin typeface="Calibri"/>
+              </a:defRPr>
+            </a:pPr>
+            <a:r>
+              <a:t>Technical Viability</a:t>
+            </a:r>
+          </a:p>
+        </p:txBody>
+      </p:sp>
+      <p:sp>
+        <p:nvSpPr>
+          <p:cNvPr id="13" name="TextBox 12"/>
+          <p:cNvSpPr txBox="1"/>
+          <p:nvPr/>
+        </p:nvSpPr>
+        <p:spPr>
+          <a:xfrm>
+            <a:off x="868680" y="1993392"/>
+            <a:ext cx="3794760" cy="1005840"/>
           </a:xfrm>
           <a:prstGeom prst="rect">
             <a:avLst/>
           </a:prstGeom>
-        </p:spPr>
-      </p:pic>
-      <p:sp>
-        <p:nvSpPr>
-          <p:cNvPr id="12" name="Rounded Rectangle 11"/>
+          <a:noFill/>
+        </p:spPr>
+        <p:txBody>
+          <a:bodyPr wrap="square" lIns="0" tIns="0" rIns="0" bIns="0">
+            <a:spAutoFit/>
+          </a:bodyPr>
+          <a:lstStyle/>
+          <a:p>
+            <a:pPr>
+              <a:defRPr sz="880">
+                <a:solidFill>
+                  <a:srgbClr val="1E293B"/>
+                </a:solidFill>
+                <a:latin typeface="Calibri"/>
+              </a:defRPr>
+            </a:pPr>
+            <a:r>
+              <a:t>• PyTorch 2.3 &amp; Vertex AI distributed FP16 training</a:t>
+            </a:r>
+            <a:br/>
+            <a:r>
+              <a:t>• Sub-45ms ONNX Runtime / TensorRT inference engine</a:t>
+            </a:r>
+            <a:br/>
+            <a:r>
+              <a:t>• Seamless xarray &amp; Zarr chunking for ocean grids</a:t>
+            </a:r>
+          </a:p>
+        </p:txBody>
+      </p:sp>
+      <p:sp>
+        <p:nvSpPr>
+          <p:cNvPr id="14" name="Rounded Rectangle 13"/>
+          <p:cNvSpPr/>
+          <p:nvPr/>
+        </p:nvSpPr>
+        <p:spPr>
+          <a:xfrm>
+            <a:off x="4983480" y="1591056"/>
+            <a:ext cx="4069080" cy="1481328"/>
+          </a:xfrm>
+          <a:prstGeom prst="roundRect">
+            <a:avLst/>
+          </a:prstGeom>
+          <a:solidFill>
+            <a:srgbClr val="F0FDFA"/>
+          </a:solidFill>
+          <a:ln w="12700">
+            <a:solidFill>
+              <a:srgbClr val="0F766E"/>
+            </a:solidFill>
+          </a:ln>
+        </p:spPr>
+        <p:style>
+          <a:lnRef idx="1">
+            <a:schemeClr val="accent1"/>
+          </a:lnRef>
+          <a:fillRef idx="3">
+            <a:schemeClr val="accent1"/>
+          </a:fillRef>
+          <a:effectRef idx="2">
+            <a:schemeClr val="accent1"/>
+          </a:effectRef>
+          <a:fontRef idx="minor">
+            <a:schemeClr val="lt1"/>
+          </a:fontRef>
+        </p:style>
+        <p:txBody>
+          <a:bodyPr rtlCol="0" anchor="ctr"/>
+          <a:lstStyle/>
+          <a:p>
+            <a:pPr algn="ctr"/>
+          </a:p>
+        </p:txBody>
+      </p:sp>
+      <p:sp>
+        <p:nvSpPr>
+          <p:cNvPr id="15" name="Rounded Rectangle 14"/>
+          <p:cNvSpPr/>
+          <p:nvPr/>
+        </p:nvSpPr>
+        <p:spPr>
+          <a:xfrm>
+            <a:off x="4983480" y="1591056"/>
+            <a:ext cx="4069080" cy="365760"/>
+          </a:xfrm>
+          <a:prstGeom prst="roundRect">
+            <a:avLst/>
+          </a:prstGeom>
+          <a:solidFill>
+            <a:srgbClr val="0F766E"/>
+          </a:solidFill>
+          <a:ln>
+            <a:solidFill>
+              <a:srgbClr val="0F766E"/>
+            </a:solidFill>
+          </a:ln>
+        </p:spPr>
+        <p:style>
+          <a:lnRef idx="1">
+            <a:schemeClr val="accent1"/>
+          </a:lnRef>
+          <a:fillRef idx="3">
+            <a:schemeClr val="accent1"/>
+          </a:fillRef>
+          <a:effectRef idx="2">
+            <a:schemeClr val="accent1"/>
+          </a:effectRef>
+          <a:fontRef idx="minor">
+            <a:schemeClr val="lt1"/>
+          </a:fontRef>
+        </p:style>
+        <p:txBody>
+          <a:bodyPr rtlCol="0" anchor="ctr"/>
+          <a:lstStyle/>
+          <a:p>
+            <a:pPr algn="ctr">
+              <a:defRPr sz="1100" b="1">
+                <a:solidFill>
+                  <a:srgbClr val="FFFFFF"/>
+                </a:solidFill>
+                <a:latin typeface="Calibri"/>
+              </a:defRPr>
+            </a:pPr>
+            <a:r>
+              <a:t>Data Governance &amp; Open Access</a:t>
+            </a:r>
+          </a:p>
+        </p:txBody>
+      </p:sp>
+      <p:sp>
+        <p:nvSpPr>
+          <p:cNvPr id="16" name="TextBox 15"/>
+          <p:cNvSpPr txBox="1"/>
+          <p:nvPr/>
+        </p:nvSpPr>
+        <p:spPr>
+          <a:xfrm>
+            <a:off x="5120640" y="1993392"/>
+            <a:ext cx="3794760" cy="1005840"/>
+          </a:xfrm>
+          <a:prstGeom prst="rect">
+            <a:avLst/>
+          </a:prstGeom>
+          <a:noFill/>
+        </p:spPr>
+        <p:txBody>
+          <a:bodyPr wrap="square" lIns="0" tIns="0" rIns="0" bIns="0">
+            <a:spAutoFit/>
+          </a:bodyPr>
+          <a:lstStyle/>
+          <a:p>
+            <a:pPr>
+              <a:defRPr sz="880">
+                <a:solidFill>
+                  <a:srgbClr val="1E293B"/>
+                </a:solidFill>
+                <a:latin typeface="Calibri"/>
+              </a:defRPr>
+            </a:pPr>
+            <a:r>
+              <a:t>• 100% Free official MoES/INCOIS, PO.DAAC &amp; CMEMS feeds</a:t>
+            </a:r>
+            <a:br/>
+            <a:r>
+              <a:t>• Zero proprietary paywalls; NetCDF4 / CF-1.8 FAIR standard</a:t>
+            </a:r>
+            <a:br/>
+            <a:r>
+              <a:t>• Spatio-temporal DINEOF &amp; Kalman gap-filling cache</a:t>
+            </a:r>
+          </a:p>
+        </p:txBody>
+      </p:sp>
+      <p:sp>
+        <p:nvSpPr>
+          <p:cNvPr id="17" name="Rounded Rectangle 16"/>
+          <p:cNvSpPr/>
+          <p:nvPr/>
+        </p:nvSpPr>
+        <p:spPr>
+          <a:xfrm>
+            <a:off x="9235440" y="1591056"/>
+            <a:ext cx="4069080" cy="1481328"/>
+          </a:xfrm>
+          <a:prstGeom prst="roundRect">
+            <a:avLst/>
+          </a:prstGeom>
+          <a:solidFill>
+            <a:srgbClr val="FAF5FF"/>
+          </a:solidFill>
+          <a:ln w="12700">
+            <a:solidFill>
+              <a:srgbClr val="7C3AED"/>
+            </a:solidFill>
+          </a:ln>
+        </p:spPr>
+        <p:style>
+          <a:lnRef idx="1">
+            <a:schemeClr val="accent1"/>
+          </a:lnRef>
+          <a:fillRef idx="3">
+            <a:schemeClr val="accent1"/>
+          </a:fillRef>
+          <a:effectRef idx="2">
+            <a:schemeClr val="accent1"/>
+          </a:effectRef>
+          <a:fontRef idx="minor">
+            <a:schemeClr val="lt1"/>
+          </a:fontRef>
+        </p:style>
+        <p:txBody>
+          <a:bodyPr rtlCol="0" anchor="ctr"/>
+          <a:lstStyle/>
+          <a:p>
+            <a:pPr algn="ctr"/>
+          </a:p>
+        </p:txBody>
+      </p:sp>
+      <p:sp>
+        <p:nvSpPr>
+          <p:cNvPr id="18" name="Rounded Rectangle 17"/>
+          <p:cNvSpPr/>
+          <p:nvPr/>
+        </p:nvSpPr>
+        <p:spPr>
+          <a:xfrm>
+            <a:off x="9235440" y="1591056"/>
+            <a:ext cx="4069080" cy="365760"/>
+          </a:xfrm>
+          <a:prstGeom prst="roundRect">
+            <a:avLst/>
+          </a:prstGeom>
+          <a:solidFill>
+            <a:srgbClr val="7C3AED"/>
+          </a:solidFill>
+          <a:ln>
+            <a:solidFill>
+              <a:srgbClr val="7C3AED"/>
+            </a:solidFill>
+          </a:ln>
+        </p:spPr>
+        <p:style>
+          <a:lnRef idx="1">
+            <a:schemeClr val="accent1"/>
+          </a:lnRef>
+          <a:fillRef idx="3">
+            <a:schemeClr val="accent1"/>
+          </a:fillRef>
+          <a:effectRef idx="2">
+            <a:schemeClr val="accent1"/>
+          </a:effectRef>
+          <a:fontRef idx="minor">
+            <a:schemeClr val="lt1"/>
+          </a:fontRef>
+        </p:style>
+        <p:txBody>
+          <a:bodyPr rtlCol="0" anchor="ctr"/>
+          <a:lstStyle/>
+          <a:p>
+            <a:pPr algn="ctr">
+              <a:defRPr sz="1100" b="1">
+                <a:solidFill>
+                  <a:srgbClr val="FFFFFF"/>
+                </a:solidFill>
+                <a:latin typeface="Calibri"/>
+              </a:defRPr>
+            </a:pPr>
+            <a:r>
+              <a:t>Operational Reliability</a:t>
+            </a:r>
+          </a:p>
+        </p:txBody>
+      </p:sp>
+      <p:sp>
+        <p:nvSpPr>
+          <p:cNvPr id="19" name="TextBox 18"/>
+          <p:cNvSpPr txBox="1"/>
+          <p:nvPr/>
+        </p:nvSpPr>
+        <p:spPr>
+          <a:xfrm>
+            <a:off x="9372600" y="1993392"/>
+            <a:ext cx="3794760" cy="1005840"/>
+          </a:xfrm>
+          <a:prstGeom prst="rect">
+            <a:avLst/>
+          </a:prstGeom>
+          <a:noFill/>
+        </p:spPr>
+        <p:txBody>
+          <a:bodyPr wrap="square" lIns="0" tIns="0" rIns="0" bIns="0">
+            <a:spAutoFit/>
+          </a:bodyPr>
+          <a:lstStyle/>
+          <a:p>
+            <a:pPr>
+              <a:defRPr sz="880">
+                <a:solidFill>
+                  <a:srgbClr val="1E293B"/>
+                </a:solidFill>
+                <a:latin typeface="Calibri"/>
+              </a:defRPr>
+            </a:pPr>
+            <a:r>
+              <a:t>• Automated 24/7 cron ingestion pipeline with fallback</a:t>
+            </a:r>
+            <a:br/>
+            <a:r>
+              <a:t>• Direct assimilation coupling into ROMS &amp; NEMO models</a:t>
+            </a:r>
+            <a:br/>
+            <a:r>
+              <a:t>• Zero single-point-of-failure microservice architecture</a:t>
+            </a:r>
+          </a:p>
+        </p:txBody>
+      </p:sp>
+      <p:sp>
+        <p:nvSpPr>
+          <p:cNvPr id="20" name="Rounded Rectangle 19"/>
+          <p:cNvSpPr/>
+          <p:nvPr/>
+        </p:nvSpPr>
+        <p:spPr>
+          <a:xfrm>
+            <a:off x="13487400" y="1591056"/>
+            <a:ext cx="4069080" cy="1481328"/>
+          </a:xfrm>
+          <a:prstGeom prst="roundRect">
+            <a:avLst/>
+          </a:prstGeom>
+          <a:solidFill>
+            <a:srgbClr val="ECFDF5"/>
+          </a:solidFill>
+          <a:ln w="12700">
+            <a:solidFill>
+              <a:srgbClr val="047857"/>
+            </a:solidFill>
+          </a:ln>
+        </p:spPr>
+        <p:style>
+          <a:lnRef idx="1">
+            <a:schemeClr val="accent1"/>
+          </a:lnRef>
+          <a:fillRef idx="3">
+            <a:schemeClr val="accent1"/>
+          </a:fillRef>
+          <a:effectRef idx="2">
+            <a:schemeClr val="accent1"/>
+          </a:effectRef>
+          <a:fontRef idx="minor">
+            <a:schemeClr val="lt1"/>
+          </a:fontRef>
+        </p:style>
+        <p:txBody>
+          <a:bodyPr rtlCol="0" anchor="ctr"/>
+          <a:lstStyle/>
+          <a:p>
+            <a:pPr algn="ctr"/>
+          </a:p>
+        </p:txBody>
+      </p:sp>
+      <p:sp>
+        <p:nvSpPr>
+          <p:cNvPr id="21" name="Rounded Rectangle 20"/>
+          <p:cNvSpPr/>
+          <p:nvPr/>
+        </p:nvSpPr>
+        <p:spPr>
+          <a:xfrm>
+            <a:off x="13487400" y="1591056"/>
+            <a:ext cx="4069080" cy="365760"/>
+          </a:xfrm>
+          <a:prstGeom prst="roundRect">
+            <a:avLst/>
+          </a:prstGeom>
+          <a:solidFill>
+            <a:srgbClr val="047857"/>
+          </a:solidFill>
+          <a:ln>
+            <a:solidFill>
+              <a:srgbClr val="047857"/>
+            </a:solidFill>
+          </a:ln>
+        </p:spPr>
+        <p:style>
+          <a:lnRef idx="1">
+            <a:schemeClr val="accent1"/>
+          </a:lnRef>
+          <a:fillRef idx="3">
+            <a:schemeClr val="accent1"/>
+          </a:fillRef>
+          <a:effectRef idx="2">
+            <a:schemeClr val="accent1"/>
+          </a:effectRef>
+          <a:fontRef idx="minor">
+            <a:schemeClr val="lt1"/>
+          </a:fontRef>
+        </p:style>
+        <p:txBody>
+          <a:bodyPr rtlCol="0" anchor="ctr"/>
+          <a:lstStyle/>
+          <a:p>
+            <a:pPr algn="ctr">
+              <a:defRPr sz="1100" b="1">
+                <a:solidFill>
+                  <a:srgbClr val="FFFFFF"/>
+                </a:solidFill>
+                <a:latin typeface="Calibri"/>
+              </a:defRPr>
+            </a:pPr>
+            <a:r>
+              <a:t>Financial Scalability</a:t>
+            </a:r>
+          </a:p>
+        </p:txBody>
+      </p:sp>
+      <p:sp>
+        <p:nvSpPr>
+          <p:cNvPr id="22" name="TextBox 21"/>
+          <p:cNvSpPr txBox="1"/>
+          <p:nvPr/>
+        </p:nvSpPr>
+        <p:spPr>
+          <a:xfrm>
+            <a:off x="13624560" y="1993392"/>
+            <a:ext cx="3794760" cy="1005840"/>
+          </a:xfrm>
+          <a:prstGeom prst="rect">
+            <a:avLst/>
+          </a:prstGeom>
+          <a:noFill/>
+        </p:spPr>
+        <p:txBody>
+          <a:bodyPr wrap="square" lIns="0" tIns="0" rIns="0" bIns="0">
+            <a:spAutoFit/>
+          </a:bodyPr>
+          <a:lstStyle/>
+          <a:p>
+            <a:pPr>
+              <a:defRPr sz="880">
+                <a:solidFill>
+                  <a:srgbClr val="1E293B"/>
+                </a:solidFill>
+                <a:latin typeface="Calibri"/>
+              </a:defRPr>
+            </a:pPr>
+            <a:r>
+              <a:t>• Rs. 15,000/mo on Vertex AI L4/T4 spot GPU instances</a:t>
+            </a:r>
+            <a:br/>
+            <a:r>
+              <a:t>• Zero commercial software licensing fees; 100% open stack</a:t>
+            </a:r>
+            <a:br/>
+            <a:r>
+              <a:t>• Highly cost-effective vs Rs. 50+ Cr Argo float array costs</a:t>
+            </a:r>
+          </a:p>
+        </p:txBody>
+      </p:sp>
+      <p:sp>
+        <p:nvSpPr>
+          <p:cNvPr id="23" name="Rounded Rectangle 22"/>
           <p:cNvSpPr/>
           <p:nvPr/>
         </p:nvSpPr>
@@ -6665,14 +8098,14 @@
       </p:sp>
       <p:sp>
         <p:nvSpPr>
-          <p:cNvPr id="13" name="TextBox 12"/>
+          <p:cNvPr id="24" name="TextBox 23"/>
           <p:cNvSpPr txBox="1"/>
           <p:nvPr/>
         </p:nvSpPr>
         <p:spPr>
           <a:xfrm>
             <a:off x="731520" y="3429000"/>
-            <a:ext cx="6766560" cy="320040"/>
+            <a:ext cx="6766560" cy="292608"/>
           </a:xfrm>
           <a:prstGeom prst="rect">
             <a:avLst/>
@@ -6694,22 +8127,22 @@
               </a:defRPr>
             </a:pPr>
             <a:r>
-              <a:t>Challenges, Risks and Mitigation Strategies</a:t>
+              <a:t>Challenges, Risks and Technical Mitigation Strategies</a:t>
             </a:r>
           </a:p>
         </p:txBody>
       </p:sp>
       <p:graphicFrame>
         <p:nvGraphicFramePr>
-          <p:cNvPr id="14" name="Table 13"/>
+          <p:cNvPr id="25" name="Table 24"/>
           <p:cNvGraphicFramePr>
             <a:graphicFrameLocks noGrp="1"/>
           </p:cNvGraphicFramePr>
           <p:nvPr/>
         </p:nvGraphicFramePr>
         <p:xfrm>
-          <a:off x="731520" y="3840480"/>
-          <a:ext cx="6766559" cy="5577840"/>
+          <a:off x="731520" y="3822191"/>
+          <a:ext cx="6766560" cy="5623560"/>
         </p:xfrm>
         <a:graphic>
           <a:graphicData uri="http://schemas.openxmlformats.org/drawingml/2006/table">
@@ -6719,16 +8152,16 @@
               </a:tblPr>
               <a:tblGrid>
                 <a:gridCol w="2011680"/>
-                <a:gridCol w="1005840"/>
-                <a:gridCol w="3749039"/>
+                <a:gridCol w="1097280"/>
+                <a:gridCol w="3657600"/>
               </a:tblGrid>
-              <a:tr h="1115568">
+              <a:tr h="1124712">
                 <a:tc>
                   <a:txBody>
-                    <a:bodyPr/>
+                    <a:bodyPr wrap="square"/>
                     <a:lstStyle/>
                     <a:p>
-                      <a:pPr>
+                      <a:pPr algn="l">
                         <a:defRPr sz="1000" b="1">
                           <a:solidFill>
                             <a:srgbClr val="FFFFFF"/>
@@ -6741,7 +8174,7 @@
                       </a:r>
                     </a:p>
                   </a:txBody>
-                  <a:tcPr>
+                  <a:tcPr marL="109728" marR="109728" marT="73152" marB="73152" anchor="ctr">
                     <a:solidFill>
                       <a:srgbClr val="0A2540"/>
                     </a:solidFill>
@@ -6749,10 +8182,10 @@
                 </a:tc>
                 <a:tc>
                   <a:txBody>
-                    <a:bodyPr/>
+                    <a:bodyPr wrap="square"/>
                     <a:lstStyle/>
                     <a:p>
-                      <a:pPr>
+                      <a:pPr algn="l">
                         <a:defRPr sz="1000" b="1">
                           <a:solidFill>
                             <a:srgbClr val="FFFFFF"/>
@@ -6765,7 +8198,7 @@
                       </a:r>
                     </a:p>
                   </a:txBody>
-                  <a:tcPr>
+                  <a:tcPr marL="109728" marR="109728" marT="73152" marB="73152" anchor="ctr">
                     <a:solidFill>
                       <a:srgbClr val="0A2540"/>
                     </a:solidFill>
@@ -6773,10 +8206,10 @@
                 </a:tc>
                 <a:tc>
                   <a:txBody>
-                    <a:bodyPr/>
+                    <a:bodyPr wrap="square"/>
                     <a:lstStyle/>
                     <a:p>
-                      <a:pPr>
+                      <a:pPr algn="l">
                         <a:defRPr sz="1000" b="1">
                           <a:solidFill>
                             <a:srgbClr val="FFFFFF"/>
@@ -6789,21 +8222,21 @@
                       </a:r>
                     </a:p>
                   </a:txBody>
-                  <a:tcPr>
+                  <a:tcPr marL="109728" marR="109728" marT="73152" marB="73152" anchor="ctr">
                     <a:solidFill>
                       <a:srgbClr val="0A2540"/>
                     </a:solidFill>
                   </a:tcPr>
                 </a:tc>
               </a:tr>
-              <a:tr h="1115568">
+              <a:tr h="1124712">
                 <a:tc>
                   <a:txBody>
-                    <a:bodyPr/>
+                    <a:bodyPr wrap="square"/>
                     <a:lstStyle/>
                     <a:p>
-                      <a:pPr>
-                        <a:defRPr sz="900">
+                      <a:pPr algn="l">
+                        <a:defRPr sz="919" b="0">
                           <a:solidFill>
                             <a:srgbClr val="1E293B"/>
                           </a:solidFill>
@@ -6815,7 +8248,7 @@
                       </a:r>
                     </a:p>
                   </a:txBody>
-                  <a:tcPr>
+                  <a:tcPr marL="109728" marR="109728" marT="73152" marB="73152" anchor="ctr">
                     <a:solidFill>
                       <a:srgbClr val="F1F5F9"/>
                     </a:solidFill>
@@ -6823,35 +8256,35 @@
                 </a:tc>
                 <a:tc>
                   <a:txBody>
-                    <a:bodyPr/>
+                    <a:bodyPr wrap="square"/>
                     <a:lstStyle/>
                     <a:p>
-                      <a:pPr>
-                        <a:defRPr sz="900" b="1">
+                      <a:pPr algn="ctr">
+                        <a:defRPr sz="950" b="1">
                           <a:solidFill>
-                            <a:srgbClr val="EF4444"/>
+                            <a:srgbClr val="991B1B"/>
                           </a:solidFill>
                           <a:latin typeface="Calibri"/>
                         </a:defRPr>
                       </a:pPr>
                       <a:r>
-                        <a:t>High</a:t>
+                        <a:t>[HIGH]</a:t>
                       </a:r>
                     </a:p>
                   </a:txBody>
-                  <a:tcPr>
+                  <a:tcPr marL="109728" marR="109728" marT="73152" marB="73152" anchor="ctr">
                     <a:solidFill>
-                      <a:srgbClr val="F1F5F9"/>
+                      <a:srgbClr val="FEF2F2"/>
                     </a:solidFill>
                   </a:tcPr>
                 </a:tc>
                 <a:tc>
                   <a:txBody>
-                    <a:bodyPr/>
+                    <a:bodyPr wrap="square"/>
                     <a:lstStyle/>
                     <a:p>
-                      <a:pPr>
-                        <a:defRPr sz="900">
+                      <a:pPr algn="l">
+                        <a:defRPr sz="919" b="0">
                           <a:solidFill>
                             <a:srgbClr val="1E293B"/>
                           </a:solidFill>
@@ -6863,21 +8296,21 @@
                       </a:r>
                     </a:p>
                   </a:txBody>
-                  <a:tcPr>
+                  <a:tcPr marL="109728" marR="109728" marT="73152" marB="73152" anchor="ctr">
                     <a:solidFill>
                       <a:srgbClr val="F1F5F9"/>
                     </a:solidFill>
                   </a:tcPr>
                 </a:tc>
               </a:tr>
-              <a:tr h="1115568">
+              <a:tr h="1124712">
                 <a:tc>
                   <a:txBody>
-                    <a:bodyPr/>
+                    <a:bodyPr wrap="square"/>
                     <a:lstStyle/>
                     <a:p>
-                      <a:pPr>
-                        <a:defRPr sz="900">
+                      <a:pPr algn="l">
+                        <a:defRPr sz="919" b="0">
                           <a:solidFill>
                             <a:srgbClr val="1E293B"/>
                           </a:solidFill>
@@ -6889,7 +8322,7 @@
                       </a:r>
                     </a:p>
                   </a:txBody>
-                  <a:tcPr>
+                  <a:tcPr marL="109728" marR="109728" marT="73152" marB="73152" anchor="ctr">
                     <a:solidFill>
                       <a:srgbClr val="FFFFFF"/>
                     </a:solidFill>
@@ -6897,35 +8330,35 @@
                 </a:tc>
                 <a:tc>
                   <a:txBody>
-                    <a:bodyPr/>
+                    <a:bodyPr wrap="square"/>
                     <a:lstStyle/>
                     <a:p>
-                      <a:pPr>
-                        <a:defRPr sz="900" b="1">
+                      <a:pPr algn="ctr">
+                        <a:defRPr sz="950" b="1">
                           <a:solidFill>
-                            <a:srgbClr val="EF4444"/>
+                            <a:srgbClr val="991B1B"/>
                           </a:solidFill>
                           <a:latin typeface="Calibri"/>
                         </a:defRPr>
                       </a:pPr>
                       <a:r>
-                        <a:t>High</a:t>
+                        <a:t>[HIGH]</a:t>
                       </a:r>
                     </a:p>
                   </a:txBody>
-                  <a:tcPr>
+                  <a:tcPr marL="109728" marR="109728" marT="73152" marB="73152" anchor="ctr">
                     <a:solidFill>
-                      <a:srgbClr val="FFFFFF"/>
+                      <a:srgbClr val="FEF2F2"/>
                     </a:solidFill>
                   </a:tcPr>
                 </a:tc>
                 <a:tc>
                   <a:txBody>
-                    <a:bodyPr/>
+                    <a:bodyPr wrap="square"/>
                     <a:lstStyle/>
                     <a:p>
-                      <a:pPr>
-                        <a:defRPr sz="900">
+                      <a:pPr algn="l">
+                        <a:defRPr sz="919" b="0">
                           <a:solidFill>
                             <a:srgbClr val="1E293B"/>
                           </a:solidFill>
@@ -6937,21 +8370,21 @@
                       </a:r>
                     </a:p>
                   </a:txBody>
-                  <a:tcPr>
+                  <a:tcPr marL="109728" marR="109728" marT="73152" marB="73152" anchor="ctr">
                     <a:solidFill>
                       <a:srgbClr val="FFFFFF"/>
                     </a:solidFill>
                   </a:tcPr>
                 </a:tc>
               </a:tr>
-              <a:tr h="1115568">
+              <a:tr h="1124712">
                 <a:tc>
                   <a:txBody>
-                    <a:bodyPr/>
+                    <a:bodyPr wrap="square"/>
                     <a:lstStyle/>
                     <a:p>
-                      <a:pPr>
-                        <a:defRPr sz="900">
+                      <a:pPr algn="l">
+                        <a:defRPr sz="919" b="0">
                           <a:solidFill>
                             <a:srgbClr val="1E293B"/>
                           </a:solidFill>
@@ -6963,7 +8396,7 @@
                       </a:r>
                     </a:p>
                   </a:txBody>
-                  <a:tcPr>
+                  <a:tcPr marL="109728" marR="109728" marT="73152" marB="73152" anchor="ctr">
                     <a:solidFill>
                       <a:srgbClr val="F1F5F9"/>
                     </a:solidFill>
@@ -6971,35 +8404,35 @@
                 </a:tc>
                 <a:tc>
                   <a:txBody>
-                    <a:bodyPr/>
+                    <a:bodyPr wrap="square"/>
                     <a:lstStyle/>
                     <a:p>
-                      <a:pPr>
-                        <a:defRPr sz="900" b="1">
+                      <a:pPr algn="ctr">
+                        <a:defRPr sz="950" b="1">
                           <a:solidFill>
-                            <a:srgbClr val="D97706"/>
+                            <a:srgbClr val="92400E"/>
                           </a:solidFill>
                           <a:latin typeface="Calibri"/>
                         </a:defRPr>
                       </a:pPr>
                       <a:r>
-                        <a:t>Medium</a:t>
+                        <a:t>[MEDIUM]</a:t>
                       </a:r>
                     </a:p>
                   </a:txBody>
-                  <a:tcPr>
+                  <a:tcPr marL="109728" marR="109728" marT="73152" marB="73152" anchor="ctr">
                     <a:solidFill>
-                      <a:srgbClr val="F1F5F9"/>
+                      <a:srgbClr val="FEF3C7"/>
                     </a:solidFill>
                   </a:tcPr>
                 </a:tc>
                 <a:tc>
                   <a:txBody>
-                    <a:bodyPr/>
+                    <a:bodyPr wrap="square"/>
                     <a:lstStyle/>
                     <a:p>
-                      <a:pPr>
-                        <a:defRPr sz="900">
+                      <a:pPr algn="l">
+                        <a:defRPr sz="919" b="0">
                           <a:solidFill>
                             <a:srgbClr val="1E293B"/>
                           </a:solidFill>
@@ -7011,21 +8444,21 @@
                       </a:r>
                     </a:p>
                   </a:txBody>
-                  <a:tcPr>
+                  <a:tcPr marL="109728" marR="109728" marT="73152" marB="73152" anchor="ctr">
                     <a:solidFill>
                       <a:srgbClr val="F1F5F9"/>
                     </a:solidFill>
                   </a:tcPr>
                 </a:tc>
               </a:tr>
-              <a:tr h="1115568">
+              <a:tr h="1124712">
                 <a:tc>
                   <a:txBody>
-                    <a:bodyPr/>
+                    <a:bodyPr wrap="square"/>
                     <a:lstStyle/>
                     <a:p>
-                      <a:pPr>
-                        <a:defRPr sz="900">
+                      <a:pPr algn="l">
+                        <a:defRPr sz="919" b="0">
                           <a:solidFill>
                             <a:srgbClr val="1E293B"/>
                           </a:solidFill>
@@ -7037,7 +8470,7 @@
                       </a:r>
                     </a:p>
                   </a:txBody>
-                  <a:tcPr>
+                  <a:tcPr marL="109728" marR="109728" marT="73152" marB="73152" anchor="ctr">
                     <a:solidFill>
                       <a:srgbClr val="FFFFFF"/>
                     </a:solidFill>
@@ -7045,35 +8478,35 @@
                 </a:tc>
                 <a:tc>
                   <a:txBody>
-                    <a:bodyPr/>
+                    <a:bodyPr wrap="square"/>
                     <a:lstStyle/>
                     <a:p>
-                      <a:pPr>
-                        <a:defRPr sz="900" b="1">
+                      <a:pPr algn="ctr">
+                        <a:defRPr sz="950" b="1">
                           <a:solidFill>
-                            <a:srgbClr val="D97706"/>
+                            <a:srgbClr val="92400E"/>
                           </a:solidFill>
                           <a:latin typeface="Calibri"/>
                         </a:defRPr>
                       </a:pPr>
                       <a:r>
-                        <a:t>Medium</a:t>
+                        <a:t>[MEDIUM]</a:t>
                       </a:r>
                     </a:p>
                   </a:txBody>
-                  <a:tcPr>
+                  <a:tcPr marL="109728" marR="109728" marT="73152" marB="73152" anchor="ctr">
                     <a:solidFill>
-                      <a:srgbClr val="FFFFFF"/>
+                      <a:srgbClr val="FEF3C7"/>
                     </a:solidFill>
                   </a:tcPr>
                 </a:tc>
                 <a:tc>
                   <a:txBody>
-                    <a:bodyPr/>
+                    <a:bodyPr wrap="square"/>
                     <a:lstStyle/>
                     <a:p>
-                      <a:pPr>
-                        <a:defRPr sz="900">
+                      <a:pPr algn="l">
+                        <a:defRPr sz="919" b="0">
                           <a:solidFill>
                             <a:srgbClr val="1E293B"/>
                           </a:solidFill>
@@ -7085,7 +8518,7 @@
                       </a:r>
                     </a:p>
                   </a:txBody>
-                  <a:tcPr>
+                  <a:tcPr marL="109728" marR="109728" marT="73152" marB="73152" anchor="ctr">
                     <a:solidFill>
                       <a:srgbClr val="FFFFFF"/>
                     </a:solidFill>
@@ -7098,7 +8531,7 @@
       </p:graphicFrame>
       <p:sp>
         <p:nvSpPr>
-          <p:cNvPr id="15" name="Rounded Rectangle 14"/>
+          <p:cNvPr id="26" name="Rounded Rectangle 25"/>
           <p:cNvSpPr/>
           <p:nvPr/>
         </p:nvSpPr>
@@ -7143,14 +8576,14 @@
       </p:sp>
       <p:sp>
         <p:nvSpPr>
-          <p:cNvPr id="16" name="TextBox 15"/>
+          <p:cNvPr id="27" name="TextBox 26"/>
           <p:cNvSpPr txBox="1"/>
           <p:nvPr/>
         </p:nvSpPr>
         <p:spPr>
           <a:xfrm>
             <a:off x="8046720" y="3429000"/>
-            <a:ext cx="9509760" cy="320040"/>
+            <a:ext cx="9509760" cy="292608"/>
           </a:xfrm>
           <a:prstGeom prst="rect">
             <a:avLst/>
@@ -7179,22 +8612,22 @@
       </p:sp>
       <p:pic>
         <p:nvPicPr>
-          <p:cNvPr id="17" name="Picture 16" descr="ocean_ai_dashboard_1790948413329.jpg"/>
+          <p:cNvPr id="28" name="Picture 27" descr="ocean_ai_dashboard_1790948413329.jpg"/>
           <p:cNvPicPr>
             <a:picLocks noChangeAspect="1"/>
           </p:cNvPicPr>
           <p:nvPr/>
         </p:nvPicPr>
         <p:blipFill>
-          <a:blip r:embed="rId5"/>
+          <a:blip r:embed="rId4"/>
           <a:stretch>
             <a:fillRect/>
           </a:stretch>
         </p:blipFill>
         <p:spPr>
           <a:xfrm>
-            <a:off x="8046720" y="3794760"/>
-            <a:ext cx="9509760" cy="5212080"/>
+            <a:off x="8138160" y="3794760"/>
+            <a:ext cx="9326880" cy="5120640"/>
           </a:xfrm>
           <a:prstGeom prst="rect">
             <a:avLst/>
@@ -7203,30 +8636,49 @@
       </p:pic>
       <p:sp>
         <p:nvSpPr>
-          <p:cNvPr id="18" name="TextBox 17"/>
-          <p:cNvSpPr txBox="1"/>
-          <p:nvPr/>
-        </p:nvSpPr>
-        <p:spPr>
-          <a:xfrm>
-            <a:off x="8046720" y="9098280"/>
-            <a:ext cx="9509760" cy="411480"/>
-          </a:xfrm>
-          <a:prstGeom prst="rect">
-            <a:avLst/>
-          </a:prstGeom>
-          <a:noFill/>
-        </p:spPr>
-        <p:txBody>
-          <a:bodyPr wrap="none" lIns="0" tIns="0" rIns="0" bIns="0">
-            <a:spAutoFit/>
-          </a:bodyPr>
+          <p:cNvPr id="29" name="Rounded Rectangle 28"/>
+          <p:cNvSpPr/>
+          <p:nvPr/>
+        </p:nvSpPr>
+        <p:spPr>
+          <a:xfrm>
+            <a:off x="8138160" y="9034272"/>
+            <a:ext cx="9326880" cy="438912"/>
+          </a:xfrm>
+          <a:prstGeom prst="roundRect">
+            <a:avLst/>
+          </a:prstGeom>
+          <a:solidFill>
+            <a:srgbClr val="0A2540"/>
+          </a:solidFill>
+          <a:ln>
+            <a:solidFill>
+              <a:srgbClr val="00B4D8"/>
+            </a:solidFill>
+          </a:ln>
+        </p:spPr>
+        <p:style>
+          <a:lnRef idx="1">
+            <a:schemeClr val="accent1"/>
+          </a:lnRef>
+          <a:fillRef idx="3">
+            <a:schemeClr val="accent1"/>
+          </a:fillRef>
+          <a:effectRef idx="2">
+            <a:schemeClr val="accent1"/>
+          </a:effectRef>
+          <a:fontRef idx="minor">
+            <a:schemeClr val="lt1"/>
+          </a:fontRef>
+        </p:style>
+        <p:txBody>
+          <a:bodyPr rtlCol="0" anchor="ctr" lIns="0" tIns="0" rIns="0" bIns="0"/>
           <a:lstStyle/>
           <a:p>
             <a:pPr algn="ctr">
               <a:defRPr sz="1050" b="1">
                 <a:solidFill>
-                  <a:srgbClr val="0077B6"/>
+                  <a:srgbClr val="00B4D8"/>
                 </a:solidFill>
                 <a:latin typeface="Calibri"/>
               </a:defRPr>
@@ -7279,7 +8731,7 @@
         </p:blipFill>
         <p:spPr>
           <a:xfrm>
-            <a:off x="548640" y="182880"/>
+            <a:off x="548640" y="164592"/>
             <a:ext cx="2011680" cy="670560"/>
           </a:xfrm>
           <a:prstGeom prst="rect">
@@ -7295,8 +8747,8 @@
         </p:nvSpPr>
         <p:spPr>
           <a:xfrm>
-            <a:off x="2743200" y="182880"/>
-            <a:ext cx="12070080" cy="822960"/>
+            <a:off x="2743200" y="164592"/>
+            <a:ext cx="12344400" cy="841248"/>
           </a:xfrm>
           <a:prstGeom prst="rect">
             <a:avLst/>
@@ -7310,7 +8762,7 @@
           <a:lstStyle/>
           <a:p>
             <a:pPr>
-              <a:defRPr sz="2600" b="1">
+              <a:defRPr sz="2500" b="1">
                 <a:solidFill>
                   <a:srgbClr val="0A2540"/>
                 </a:solidFill>
@@ -7323,7 +8775,7 @@
           </a:p>
           <a:p>
             <a:pPr>
-              <a:defRPr sz="1300" b="1">
+              <a:defRPr sz="1250" b="1">
                 <a:solidFill>
                   <a:srgbClr val="0077B6"/>
                 </a:solidFill>
@@ -7352,8 +8804,8 @@
         </p:blipFill>
         <p:spPr>
           <a:xfrm>
-            <a:off x="15361920" y="137160"/>
-            <a:ext cx="2377440" cy="1123085"/>
+            <a:off x="15453359" y="137160"/>
+            <a:ext cx="2286000" cy="1079890"/>
           </a:xfrm>
           <a:prstGeom prst="rect">
             <a:avLst/>
@@ -8111,7 +9563,7 @@
         <p:spPr>
           <a:xfrm>
             <a:off x="731520" y="2834640"/>
-            <a:ext cx="10058400" cy="320040"/>
+            <a:ext cx="10058400" cy="292608"/>
           </a:xfrm>
           <a:prstGeom prst="rect">
             <a:avLst/>
@@ -8133,7 +9585,7 @@
               </a:defRPr>
             </a:pPr>
             <a:r>
-              <a:t>Multidimensional Benefits of the Solution</a:t>
+              <a:t>Multidimensional Strategic Benefits to the Nation</a:t>
             </a:r>
           </a:p>
         </p:txBody>
@@ -8146,8 +9598,8 @@
         </p:nvSpPr>
         <p:spPr>
           <a:xfrm>
-            <a:off x="731520" y="3200400"/>
-            <a:ext cx="3200400" cy="2743200"/>
+            <a:off x="731520" y="3182112"/>
+            <a:ext cx="3200400" cy="2816352"/>
           </a:xfrm>
           <a:prstGeom prst="roundRect">
             <a:avLst/>
@@ -8191,8 +9643,8 @@
         </p:nvSpPr>
         <p:spPr>
           <a:xfrm>
-            <a:off x="868680" y="3291840"/>
-            <a:ext cx="2926080" cy="2560320"/>
+            <a:off x="868680" y="3255264"/>
+            <a:ext cx="2926080" cy="2670048"/>
           </a:xfrm>
           <a:prstGeom prst="rect">
             <a:avLst/>
@@ -8207,7 +9659,7 @@
           <a:p>
             <a:pPr>
               <a:spcAft>
-                <a:spcPts val="600"/>
+                <a:spcPts val="400"/>
               </a:spcAft>
               <a:defRPr sz="1150" b="1">
                 <a:solidFill>
@@ -8222,7 +9674,7 @@
           </a:p>
           <a:p>
             <a:pPr>
-              <a:defRPr sz="900">
+              <a:defRPr sz="919">
                 <a:solidFill>
                   <a:srgbClr val="1E293B"/>
                 </a:solidFill>
@@ -8230,19 +9682,19 @@
               </a:defRPr>
             </a:pPr>
             <a:r>
-              <a:t>• Safer marine operations with 48h cyclone warning</a:t>
+              <a:t>• 48-Hour Advance Cyclone Rapid Intensification warning protects coastal lives &amp; critical infrastructure.</a:t>
             </a:r>
             <a:br/>
             <a:r>
-              <a:t>• Precise thermocline Potential Fishing Zone advisory</a:t>
+              <a:t>• Precise thermocline Potential Fishing Zone (PFZ) advisories delivered directly to artisanal fisherfolk.</a:t>
             </a:r>
             <a:br/>
             <a:r>
-              <a:t>• Continuous daily coverage replacing sparse point floats</a:t>
+              <a:t>• Continuous daily 3D coverage replacing sparse point floats across 7,500 km Indian coastline.</a:t>
             </a:r>
             <a:br/>
             <a:r>
-              <a:t>• Protects coastal communities in Odisha, AP, WB, Gujarat</a:t>
+              <a:t>• Safeguards 1.2M+ fishers across Tamil Nadu, Andhra Pradesh, Odisha, West Bengal, Kerala &amp; Gujarat.</a:t>
             </a:r>
           </a:p>
         </p:txBody>
@@ -8255,8 +9707,8 @@
         </p:nvSpPr>
         <p:spPr>
           <a:xfrm>
-            <a:off x="4114800" y="3200400"/>
-            <a:ext cx="3200400" cy="2743200"/>
+            <a:off x="4114800" y="3182112"/>
+            <a:ext cx="3200400" cy="2816352"/>
           </a:xfrm>
           <a:prstGeom prst="roundRect">
             <a:avLst/>
@@ -8300,8 +9752,8 @@
         </p:nvSpPr>
         <p:spPr>
           <a:xfrm>
-            <a:off x="4251960" y="3291840"/>
-            <a:ext cx="2926080" cy="2560320"/>
+            <a:off x="4251960" y="3255264"/>
+            <a:ext cx="2926080" cy="2670048"/>
           </a:xfrm>
           <a:prstGeom prst="rect">
             <a:avLst/>
@@ -8316,7 +9768,7 @@
           <a:p>
             <a:pPr>
               <a:spcAft>
-                <a:spcPts val="600"/>
+                <a:spcPts val="400"/>
               </a:spcAft>
               <a:defRPr sz="1150" b="1">
                 <a:solidFill>
@@ -8331,7 +9783,7 @@
           </a:p>
           <a:p>
             <a:pPr>
-              <a:defRPr sz="900">
+              <a:defRPr sz="919">
                 <a:solidFill>
                   <a:srgbClr val="1E293B"/>
                 </a:solidFill>
@@ -8339,19 +9791,19 @@
               </a:defRPr>
             </a:pPr>
             <a:r>
-              <a:t>• 30% diesel fuel saved navigating to productive zones</a:t>
+              <a:t>• 30% diesel fuel saved navigating directly to productive thermocline upwelling zones (~Rs 45,000/boat/mo).</a:t>
             </a:r>
             <a:br/>
             <a:r>
-              <a:t>• Substantial increase in Catch Per Unit Effort (CPUE)</a:t>
+              <a:t>• Substantial increase in Catch Per Unit Effort (CPUE) for pelagic fisheries (Tuna, Mackerel, Sardines).</a:t>
             </a:r>
             <a:br/>
             <a:r>
-              <a:t>• Prevents fishing fleet losses during rapid storm onset</a:t>
+              <a:t>• Prevents devastating fishing fleet losses during sudden, unpredicted monsoonal storm onset.</a:t>
             </a:r>
             <a:br/>
             <a:r>
-              <a:t>• Bolsters India's $10B marine exports sector</a:t>
+              <a:t>• Bolsters India's $10B+ marine seafood exports sector under the national PMMSY scheme.</a:t>
             </a:r>
           </a:p>
         </p:txBody>
@@ -8364,8 +9816,8 @@
         </p:nvSpPr>
         <p:spPr>
           <a:xfrm>
-            <a:off x="7498080" y="3200400"/>
-            <a:ext cx="3200400" cy="2743200"/>
+            <a:off x="7498080" y="3182112"/>
+            <a:ext cx="3200400" cy="2816352"/>
           </a:xfrm>
           <a:prstGeom prst="roundRect">
             <a:avLst/>
@@ -8409,8 +9861,8 @@
         </p:nvSpPr>
         <p:spPr>
           <a:xfrm>
-            <a:off x="7635240" y="3291840"/>
-            <a:ext cx="2926080" cy="2560320"/>
+            <a:off x="7635240" y="3255264"/>
+            <a:ext cx="2926080" cy="2670048"/>
           </a:xfrm>
           <a:prstGeom prst="rect">
             <a:avLst/>
@@ -8425,7 +9877,7 @@
           <a:p>
             <a:pPr>
               <a:spcAft>
-                <a:spcPts val="600"/>
+                <a:spcPts val="400"/>
               </a:spcAft>
               <a:defRPr sz="1150" b="1">
                 <a:solidFill>
@@ -8440,7 +9892,7 @@
           </a:p>
           <a:p>
             <a:pPr>
-              <a:defRPr sz="900">
+              <a:defRPr sz="919">
                 <a:solidFill>
                   <a:srgbClr val="1E293B"/>
                 </a:solidFill>
@@ -8448,19 +9900,19 @@
               </a:defRPr>
             </a:pPr>
             <a:r>
-              <a:t>• Monitors subsurface Marine Heatwaves (MHWs)</a:t>
+              <a:t>• Monitors subsurface Marine Heatwaves (MHWs) to predict thermal stress before surface mortality.</a:t>
             </a:r>
             <a:br/>
             <a:r>
-              <a:t>• Early alerts for coral bleaching in Lakshadweep/Mannar</a:t>
+              <a:t>• Early warning alerts for coral bleaching in Lakshadweep, Andaman &amp; Nicobar, and Gulf of Mannar.</a:t>
             </a:r>
             <a:br/>
             <a:r>
-              <a:t>• Tracks upper-ocean heat content &amp; stratification</a:t>
+              <a:t>• Quantifies 0–1000m upper-ocean heat content &amp; stratification dynamics for long-term climate models.</a:t>
             </a:r>
             <a:br/>
             <a:r>
-              <a:t>• Directly empowers India's sustainable Blue Economy</a:t>
+              <a:t>• Empowers India's sustainable Blue Economy vision in full alignment with UN SDG 14 (Life Below Water).</a:t>
             </a:r>
           </a:p>
         </p:txBody>
@@ -8519,7 +9971,7 @@
         <p:spPr>
           <a:xfrm>
             <a:off x="11338560" y="2834640"/>
-            <a:ext cx="6217920" cy="320040"/>
+            <a:ext cx="6217920" cy="292608"/>
           </a:xfrm>
           <a:prstGeom prst="rect">
             <a:avLst/>
@@ -8562,7 +10014,7 @@
         </p:blipFill>
         <p:spPr>
           <a:xfrm>
-            <a:off x="12070080" y="3200400"/>
+            <a:off x="12070080" y="3182112"/>
             <a:ext cx="4754880" cy="2894904"/>
           </a:xfrm>
           <a:prstGeom prst="rect">
@@ -8578,8 +10030,8 @@
         </p:nvSpPr>
         <p:spPr>
           <a:xfrm>
-            <a:off x="548640" y="6309360"/>
-            <a:ext cx="10424160" cy="3291840"/>
+            <a:off x="548640" y="6263640"/>
+            <a:ext cx="10424160" cy="3337560"/>
           </a:xfrm>
           <a:prstGeom prst="roundRect">
             <a:avLst/>
@@ -8623,8 +10075,8 @@
         </p:nvSpPr>
         <p:spPr>
           <a:xfrm>
-            <a:off x="731520" y="6400800"/>
-            <a:ext cx="10058400" cy="320040"/>
+            <a:off x="731520" y="6355080"/>
+            <a:ext cx="10058400" cy="292608"/>
           </a:xfrm>
           <a:prstGeom prst="rect">
             <a:avLst/>
@@ -8659,8 +10111,8 @@
         </p:nvSpPr>
         <p:spPr>
           <a:xfrm>
-            <a:off x="731520" y="6766560"/>
-            <a:ext cx="3200400" cy="2651760"/>
+            <a:off x="731520" y="6720840"/>
+            <a:ext cx="3200400" cy="2743200"/>
           </a:xfrm>
           <a:prstGeom prst="roundRect">
             <a:avLst/>
@@ -8712,8 +10164,8 @@
         </p:blipFill>
         <p:spPr>
           <a:xfrm>
-            <a:off x="868680" y="6903720"/>
-            <a:ext cx="822960" cy="818257"/>
+            <a:off x="1874519" y="6839712"/>
+            <a:ext cx="914400" cy="909175"/>
           </a:xfrm>
           <a:prstGeom prst="rect">
             <a:avLst/>
@@ -8728,8 +10180,8 @@
         </p:nvSpPr>
         <p:spPr>
           <a:xfrm>
-            <a:off x="1783080" y="6903720"/>
-            <a:ext cx="2011680" cy="731520"/>
+            <a:off x="868680" y="7818120"/>
+            <a:ext cx="2926080" cy="320040"/>
           </a:xfrm>
           <a:prstGeom prst="rect">
             <a:avLst/>
@@ -8742,7 +10194,7 @@
           </a:bodyPr>
           <a:lstStyle/>
           <a:p>
-            <a:pPr>
+            <a:pPr algn="ctr">
               <a:defRPr sz="1100" b="1">
                 <a:solidFill>
                   <a:srgbClr val="0A2540"/>
@@ -8764,8 +10216,8 @@
         </p:nvSpPr>
         <p:spPr>
           <a:xfrm>
-            <a:off x="868680" y="7726679"/>
-            <a:ext cx="2926080" cy="1554480"/>
+            <a:off x="868680" y="8183879"/>
+            <a:ext cx="2926080" cy="1188720"/>
           </a:xfrm>
           <a:prstGeom prst="rect">
             <a:avLst/>
@@ -8778,8 +10230,8 @@
           </a:bodyPr>
           <a:lstStyle/>
           <a:p>
-            <a:pPr>
-              <a:defRPr sz="950">
+            <a:pPr algn="ctr">
+              <a:defRPr sz="919">
                 <a:solidFill>
                   <a:srgbClr val="1E293B"/>
                 </a:solidFill>
@@ -8787,7 +10239,7 @@
               </a:defRPr>
             </a:pPr>
             <a:r>
-              <a:t>Early warning of rapid cyclone intensification; protects vulnerable coastal communities across 7,500 km of Indian coastline.</a:t>
+              <a:t>Early warning of rapid cyclone intensification (TCHP); protects vulnerable coastal communities across 7,500 km of Indian coastline.</a:t>
             </a:r>
           </a:p>
         </p:txBody>
@@ -8800,8 +10252,8 @@
         </p:nvSpPr>
         <p:spPr>
           <a:xfrm>
-            <a:off x="4114800" y="6766560"/>
-            <a:ext cx="3200400" cy="2651760"/>
+            <a:off x="4114800" y="6720840"/>
+            <a:ext cx="3200400" cy="2743200"/>
           </a:xfrm>
           <a:prstGeom prst="roundRect">
             <a:avLst/>
@@ -8853,8 +10305,8 @@
         </p:blipFill>
         <p:spPr>
           <a:xfrm>
-            <a:off x="4251960" y="6903720"/>
-            <a:ext cx="822960" cy="818257"/>
+            <a:off x="5257800" y="6839712"/>
+            <a:ext cx="914400" cy="909175"/>
           </a:xfrm>
           <a:prstGeom prst="rect">
             <a:avLst/>
@@ -8869,8 +10321,8 @@
         </p:nvSpPr>
         <p:spPr>
           <a:xfrm>
-            <a:off x="5166360" y="6903720"/>
-            <a:ext cx="2011680" cy="731520"/>
+            <a:off x="4251960" y="7818120"/>
+            <a:ext cx="2926080" cy="320040"/>
           </a:xfrm>
           <a:prstGeom prst="rect">
             <a:avLst/>
@@ -8883,7 +10335,7 @@
           </a:bodyPr>
           <a:lstStyle/>
           <a:p>
-            <a:pPr>
+            <a:pPr algn="ctr">
               <a:defRPr sz="1100" b="1">
                 <a:solidFill>
                   <a:srgbClr val="0A2540"/>
@@ -8905,8 +10357,8 @@
         </p:nvSpPr>
         <p:spPr>
           <a:xfrm>
-            <a:off x="4251960" y="7726679"/>
-            <a:ext cx="2926080" cy="1554480"/>
+            <a:off x="4251960" y="8183879"/>
+            <a:ext cx="2926080" cy="1188720"/>
           </a:xfrm>
           <a:prstGeom prst="rect">
             <a:avLst/>
@@ -8919,8 +10371,8 @@
           </a:bodyPr>
           <a:lstStyle/>
           <a:p>
-            <a:pPr>
-              <a:defRPr sz="950">
+            <a:pPr algn="ctr">
+              <a:defRPr sz="919">
                 <a:solidFill>
                   <a:srgbClr val="1E293B"/>
                 </a:solidFill>
@@ -8941,8 +10393,8 @@
         </p:nvSpPr>
         <p:spPr>
           <a:xfrm>
-            <a:off x="7498080" y="6766560"/>
-            <a:ext cx="3200400" cy="2651760"/>
+            <a:off x="7498080" y="6720840"/>
+            <a:ext cx="3200400" cy="2743200"/>
           </a:xfrm>
           <a:prstGeom prst="roundRect">
             <a:avLst/>
@@ -8994,8 +10446,8 @@
         </p:blipFill>
         <p:spPr>
           <a:xfrm>
-            <a:off x="7635240" y="6903720"/>
-            <a:ext cx="822960" cy="818257"/>
+            <a:off x="8641080" y="6839712"/>
+            <a:ext cx="914400" cy="909175"/>
           </a:xfrm>
           <a:prstGeom prst="rect">
             <a:avLst/>
@@ -9010,8 +10462,8 @@
         </p:nvSpPr>
         <p:spPr>
           <a:xfrm>
-            <a:off x="8549640" y="6903720"/>
-            <a:ext cx="2011680" cy="731520"/>
+            <a:off x="7635240" y="7818120"/>
+            <a:ext cx="2926080" cy="320040"/>
           </a:xfrm>
           <a:prstGeom prst="rect">
             <a:avLst/>
@@ -9024,7 +10476,7 @@
           </a:bodyPr>
           <a:lstStyle/>
           <a:p>
-            <a:pPr>
+            <a:pPr algn="ctr">
               <a:defRPr sz="1100" b="1">
                 <a:solidFill>
                   <a:srgbClr val="0A2540"/>
@@ -9046,8 +10498,8 @@
         </p:nvSpPr>
         <p:spPr>
           <a:xfrm>
-            <a:off x="7635240" y="7726679"/>
-            <a:ext cx="2926080" cy="1554480"/>
+            <a:off x="7635240" y="8183879"/>
+            <a:ext cx="2926080" cy="1188720"/>
           </a:xfrm>
           <a:prstGeom prst="rect">
             <a:avLst/>
@@ -9060,8 +10512,8 @@
           </a:bodyPr>
           <a:lstStyle/>
           <a:p>
-            <a:pPr>
-              <a:defRPr sz="950">
+            <a:pPr algn="ctr">
+              <a:defRPr sz="919">
                 <a:solidFill>
                   <a:srgbClr val="1E293B"/>
                 </a:solidFill>
@@ -9069,7 +10521,7 @@
               </a:defRPr>
             </a:pPr>
             <a:r>
-              <a:t>Supplies high-resolution daily 3D assimilation feed; provides Navy with vertical Sound Velocity Profiles (SVP) for sonar.</a:t>
+              <a:t>Supplies high-resolution daily 3D assimilation feed; provides Navy with vertical Sound Velocity Profiles (SVP) for sonar operations.</a:t>
             </a:r>
           </a:p>
         </p:txBody>
@@ -9082,8 +10534,8 @@
         </p:nvSpPr>
         <p:spPr>
           <a:xfrm>
-            <a:off x="11155680" y="6309360"/>
-            <a:ext cx="6583680" cy="3291840"/>
+            <a:off x="11155680" y="6263640"/>
+            <a:ext cx="6583680" cy="3337560"/>
           </a:xfrm>
           <a:prstGeom prst="roundRect">
             <a:avLst/>
@@ -9127,8 +10579,8 @@
         </p:nvSpPr>
         <p:spPr>
           <a:xfrm>
-            <a:off x="11338560" y="6400800"/>
-            <a:ext cx="6217920" cy="320040"/>
+            <a:off x="11338560" y="6355080"/>
+            <a:ext cx="6217920" cy="292608"/>
           </a:xfrm>
           <a:prstGeom prst="rect">
             <a:avLst/>
@@ -9150,21 +10602,121 @@
               </a:defRPr>
             </a:pPr>
             <a:r>
-              <a:t>Sustainability &amp; Deployment Roadmap</a:t>
-            </a:r>
-          </a:p>
-        </p:txBody>
-      </p:sp>
-      <p:sp>
-        <p:nvSpPr>
-          <p:cNvPr id="47" name="TextBox 46"/>
+              <a:t>Operational Sustainability &amp; Deployment Roadmap</a:t>
+            </a:r>
+          </a:p>
+        </p:txBody>
+      </p:sp>
+      <p:sp>
+        <p:nvSpPr>
+          <p:cNvPr id="47" name="Rounded Rectangle 46"/>
+          <p:cNvSpPr/>
+          <p:nvPr/>
+        </p:nvSpPr>
+        <p:spPr>
+          <a:xfrm>
+            <a:off x="11338560" y="6720840"/>
+            <a:ext cx="6217920" cy="621792"/>
+          </a:xfrm>
+          <a:prstGeom prst="roundRect">
+            <a:avLst/>
+          </a:prstGeom>
+          <a:solidFill>
+            <a:srgbClr val="EFF6FF"/>
+          </a:solidFill>
+          <a:ln w="12700">
+            <a:solidFill>
+              <a:srgbClr val="E2E8F0"/>
+            </a:solidFill>
+          </a:ln>
+        </p:spPr>
+        <p:style>
+          <a:lnRef idx="1">
+            <a:schemeClr val="accent1"/>
+          </a:lnRef>
+          <a:fillRef idx="3">
+            <a:schemeClr val="accent1"/>
+          </a:fillRef>
+          <a:effectRef idx="2">
+            <a:schemeClr val="accent1"/>
+          </a:effectRef>
+          <a:fontRef idx="minor">
+            <a:schemeClr val="lt1"/>
+          </a:fontRef>
+        </p:style>
+        <p:txBody>
+          <a:bodyPr rtlCol="0" anchor="ctr"/>
+          <a:lstStyle/>
+          <a:p>
+            <a:pPr algn="ctr"/>
+          </a:p>
+        </p:txBody>
+      </p:sp>
+      <p:sp>
+        <p:nvSpPr>
+          <p:cNvPr id="48" name="Rounded Rectangle 47"/>
+          <p:cNvSpPr/>
+          <p:nvPr/>
+        </p:nvSpPr>
+        <p:spPr>
+          <a:xfrm>
+            <a:off x="11430000" y="6830568"/>
+            <a:ext cx="1600200" cy="402336"/>
+          </a:xfrm>
+          <a:prstGeom prst="roundRect">
+            <a:avLst/>
+          </a:prstGeom>
+          <a:solidFill>
+            <a:srgbClr val="0077B6"/>
+          </a:solidFill>
+          <a:ln>
+            <a:solidFill>
+              <a:srgbClr val="0077B6"/>
+            </a:solidFill>
+          </a:ln>
+        </p:spPr>
+        <p:style>
+          <a:lnRef idx="1">
+            <a:schemeClr val="accent1"/>
+          </a:lnRef>
+          <a:fillRef idx="3">
+            <a:schemeClr val="accent1"/>
+          </a:fillRef>
+          <a:effectRef idx="2">
+            <a:schemeClr val="accent1"/>
+          </a:effectRef>
+          <a:fontRef idx="minor">
+            <a:schemeClr val="lt1"/>
+          </a:fontRef>
+        </p:style>
+        <p:txBody>
+          <a:bodyPr rtlCol="0" anchor="ctr"/>
+          <a:lstStyle/>
+          <a:p>
+            <a:pPr algn="ctr">
+              <a:defRPr sz="850" b="1">
+                <a:solidFill>
+                  <a:srgbClr val="FFFFFF"/>
+                </a:solidFill>
+                <a:latin typeface="Calibri"/>
+              </a:defRPr>
+            </a:pPr>
+            <a:r>
+              <a:t>PHASE 1 [Q1-Q2]</a:t>
+            </a:r>
+          </a:p>
+        </p:txBody>
+      </p:sp>
+      <p:sp>
+        <p:nvSpPr>
+          <p:cNvPr id="49" name="TextBox 48"/>
           <p:cNvSpPr txBox="1"/>
           <p:nvPr/>
         </p:nvSpPr>
         <p:spPr>
           <a:xfrm>
-            <a:off x="11338560" y="6766560"/>
-            <a:ext cx="6217920" cy="2743200"/>
+            <a:off x="13121640" y="6793992"/>
+            <a:ext cx="4343400" cy="475488"/>
           </a:xfrm>
           <a:prstGeom prst="rect">
             <a:avLst/>
@@ -9178,23 +10730,143 @@
           <a:lstStyle/>
           <a:p>
             <a:pPr>
-              <a:defRPr sz="1050" b="1">
-                <a:solidFill>
-                  <a:srgbClr val="0077B6"/>
-                </a:solidFill>
-                <a:latin typeface="Calibri"/>
-              </a:defRPr>
-            </a:pPr>
-            <a:r>
-              <a:t>Next 3 Months</a:t>
-            </a:r>
-          </a:p>
+              <a:defRPr sz="860">
+                <a:solidFill>
+                  <a:srgbClr val="1E293B"/>
+                </a:solidFill>
+                <a:latin typeface="Calibri"/>
+              </a:defRPr>
+            </a:pPr>
+            <a:r>
+              <a:t>North Indian Ocean Beta Pipeline on Vertex AI; continuous automated validation against INCOIS LAS Argo profilers (&lt;45ms inference).</a:t>
+            </a:r>
+          </a:p>
+        </p:txBody>
+      </p:sp>
+      <p:sp>
+        <p:nvSpPr>
+          <p:cNvPr id="50" name="Rounded Rectangle 49"/>
+          <p:cNvSpPr/>
+          <p:nvPr/>
+        </p:nvSpPr>
+        <p:spPr>
+          <a:xfrm>
+            <a:off x="11338560" y="7397496"/>
+            <a:ext cx="6217920" cy="621792"/>
+          </a:xfrm>
+          <a:prstGeom prst="roundRect">
+            <a:avLst/>
+          </a:prstGeom>
+          <a:solidFill>
+            <a:srgbClr val="F0FDFA"/>
+          </a:solidFill>
+          <a:ln w="12700">
+            <a:solidFill>
+              <a:srgbClr val="E2E8F0"/>
+            </a:solidFill>
+          </a:ln>
+        </p:spPr>
+        <p:style>
+          <a:lnRef idx="1">
+            <a:schemeClr val="accent1"/>
+          </a:lnRef>
+          <a:fillRef idx="3">
+            <a:schemeClr val="accent1"/>
+          </a:fillRef>
+          <a:effectRef idx="2">
+            <a:schemeClr val="accent1"/>
+          </a:effectRef>
+          <a:fontRef idx="minor">
+            <a:schemeClr val="lt1"/>
+          </a:fontRef>
+        </p:style>
+        <p:txBody>
+          <a:bodyPr rtlCol="0" anchor="ctr"/>
+          <a:lstStyle/>
+          <a:p>
+            <a:pPr algn="ctr"/>
+          </a:p>
+        </p:txBody>
+      </p:sp>
+      <p:sp>
+        <p:nvSpPr>
+          <p:cNvPr id="51" name="Rounded Rectangle 50"/>
+          <p:cNvSpPr/>
+          <p:nvPr/>
+        </p:nvSpPr>
+        <p:spPr>
+          <a:xfrm>
+            <a:off x="11430000" y="7507223"/>
+            <a:ext cx="1600200" cy="402336"/>
+          </a:xfrm>
+          <a:prstGeom prst="roundRect">
+            <a:avLst/>
+          </a:prstGeom>
+          <a:solidFill>
+            <a:srgbClr val="0F766E"/>
+          </a:solidFill>
+          <a:ln>
+            <a:solidFill>
+              <a:srgbClr val="0F766E"/>
+            </a:solidFill>
+          </a:ln>
+        </p:spPr>
+        <p:style>
+          <a:lnRef idx="1">
+            <a:schemeClr val="accent1"/>
+          </a:lnRef>
+          <a:fillRef idx="3">
+            <a:schemeClr val="accent1"/>
+          </a:fillRef>
+          <a:effectRef idx="2">
+            <a:schemeClr val="accent1"/>
+          </a:effectRef>
+          <a:fontRef idx="minor">
+            <a:schemeClr val="lt1"/>
+          </a:fontRef>
+        </p:style>
+        <p:txBody>
+          <a:bodyPr rtlCol="0" anchor="ctr"/>
+          <a:lstStyle/>
+          <a:p>
+            <a:pPr algn="ctr">
+              <a:defRPr sz="850" b="1">
+                <a:solidFill>
+                  <a:srgbClr val="FFFFFF"/>
+                </a:solidFill>
+                <a:latin typeface="Calibri"/>
+              </a:defRPr>
+            </a:pPr>
+            <a:r>
+              <a:t>PHASE 2 [YEAR 1]</a:t>
+            </a:r>
+          </a:p>
+        </p:txBody>
+      </p:sp>
+      <p:sp>
+        <p:nvSpPr>
+          <p:cNvPr id="52" name="TextBox 51"/>
+          <p:cNvSpPr txBox="1"/>
+          <p:nvPr/>
+        </p:nvSpPr>
+        <p:spPr>
+          <a:xfrm>
+            <a:off x="13121640" y="7470648"/>
+            <a:ext cx="4343400" cy="475488"/>
+          </a:xfrm>
+          <a:prstGeom prst="rect">
+            <a:avLst/>
+          </a:prstGeom>
+          <a:noFill/>
+        </p:spPr>
+        <p:txBody>
+          <a:bodyPr wrap="square" lIns="0" tIns="0" rIns="0" bIns="0">
+            <a:spAutoFit/>
+          </a:bodyPr>
+          <a:lstStyle/>
           <a:p>
             <a:pPr>
-              <a:spcAft>
-                <a:spcPts val="400"/>
-              </a:spcAft>
-              <a:defRPr sz="919">
+              <a:defRPr sz="860">
                 <a:solidFill>
                   <a:srgbClr val="1E293B"/>
                 </a:solidFill>
@@ -9202,28 +10874,271 @@
               </a:defRPr>
             </a:pPr>
             <a:r>
-              <a:t>North Indian Ocean beta model on Vertex AI; continuous INCOIS LAS ARGO validation.</a:t>
-            </a:r>
-          </a:p>
+              <a:t>Operational integration into INCOIS SAMUDRA mobile application &amp; IMD automated Cyclone Advisory bulletins.</a:t>
+            </a:r>
+          </a:p>
+        </p:txBody>
+      </p:sp>
+      <p:sp>
+        <p:nvSpPr>
+          <p:cNvPr id="53" name="Rounded Rectangle 52"/>
+          <p:cNvSpPr/>
+          <p:nvPr/>
+        </p:nvSpPr>
+        <p:spPr>
+          <a:xfrm>
+            <a:off x="11338560" y="8074152"/>
+            <a:ext cx="6217920" cy="621792"/>
+          </a:xfrm>
+          <a:prstGeom prst="roundRect">
+            <a:avLst/>
+          </a:prstGeom>
+          <a:solidFill>
+            <a:srgbClr val="FAF5FF"/>
+          </a:solidFill>
+          <a:ln w="12700">
+            <a:solidFill>
+              <a:srgbClr val="E2E8F0"/>
+            </a:solidFill>
+          </a:ln>
+        </p:spPr>
+        <p:style>
+          <a:lnRef idx="1">
+            <a:schemeClr val="accent1"/>
+          </a:lnRef>
+          <a:fillRef idx="3">
+            <a:schemeClr val="accent1"/>
+          </a:fillRef>
+          <a:effectRef idx="2">
+            <a:schemeClr val="accent1"/>
+          </a:effectRef>
+          <a:fontRef idx="minor">
+            <a:schemeClr val="lt1"/>
+          </a:fontRef>
+        </p:style>
+        <p:txBody>
+          <a:bodyPr rtlCol="0" anchor="ctr"/>
+          <a:lstStyle/>
+          <a:p>
+            <a:pPr algn="ctr"/>
+          </a:p>
+        </p:txBody>
+      </p:sp>
+      <p:sp>
+        <p:nvSpPr>
+          <p:cNvPr id="54" name="Rounded Rectangle 53"/>
+          <p:cNvSpPr/>
+          <p:nvPr/>
+        </p:nvSpPr>
+        <p:spPr>
+          <a:xfrm>
+            <a:off x="11430000" y="8183879"/>
+            <a:ext cx="1600200" cy="402336"/>
+          </a:xfrm>
+          <a:prstGeom prst="roundRect">
+            <a:avLst/>
+          </a:prstGeom>
+          <a:solidFill>
+            <a:srgbClr val="7C3AED"/>
+          </a:solidFill>
+          <a:ln>
+            <a:solidFill>
+              <a:srgbClr val="7C3AED"/>
+            </a:solidFill>
+          </a:ln>
+        </p:spPr>
+        <p:style>
+          <a:lnRef idx="1">
+            <a:schemeClr val="accent1"/>
+          </a:lnRef>
+          <a:fillRef idx="3">
+            <a:schemeClr val="accent1"/>
+          </a:fillRef>
+          <a:effectRef idx="2">
+            <a:schemeClr val="accent1"/>
+          </a:effectRef>
+          <a:fontRef idx="minor">
+            <a:schemeClr val="lt1"/>
+          </a:fontRef>
+        </p:style>
+        <p:txBody>
+          <a:bodyPr rtlCol="0" anchor="ctr"/>
+          <a:lstStyle/>
+          <a:p>
+            <a:pPr algn="ctr">
+              <a:defRPr sz="850" b="1">
+                <a:solidFill>
+                  <a:srgbClr val="FFFFFF"/>
+                </a:solidFill>
+                <a:latin typeface="Calibri"/>
+              </a:defRPr>
+            </a:pPr>
+            <a:r>
+              <a:t>PHASE 3 [YEAR 2]</a:t>
+            </a:r>
+          </a:p>
+        </p:txBody>
+      </p:sp>
+      <p:sp>
+        <p:nvSpPr>
+          <p:cNvPr id="55" name="TextBox 54"/>
+          <p:cNvSpPr txBox="1"/>
+          <p:nvPr/>
+        </p:nvSpPr>
+        <p:spPr>
+          <a:xfrm>
+            <a:off x="13121640" y="8147304"/>
+            <a:ext cx="4343400" cy="475488"/>
+          </a:xfrm>
+          <a:prstGeom prst="rect">
+            <a:avLst/>
+          </a:prstGeom>
+          <a:noFill/>
+        </p:spPr>
+        <p:txBody>
+          <a:bodyPr wrap="square" lIns="0" tIns="0" rIns="0" bIns="0">
+            <a:spAutoFit/>
+          </a:bodyPr>
+          <a:lstStyle/>
           <a:p>
             <a:pPr>
-              <a:defRPr sz="1050" b="1">
-                <a:solidFill>
-                  <a:srgbClr val="0077B6"/>
-                </a:solidFill>
-                <a:latin typeface="Calibri"/>
-              </a:defRPr>
-            </a:pPr>
-            <a:r>
-              <a:t>Year 1</a:t>
-            </a:r>
-          </a:p>
+              <a:defRPr sz="860">
+                <a:solidFill>
+                  <a:srgbClr val="1E293B"/>
+                </a:solidFill>
+                <a:latin typeface="Calibri"/>
+              </a:defRPr>
+            </a:pPr>
+            <a:r>
+              <a:t>Pan-Indian Ocean expansion; incorporation of BGC-Argo biogeochemical sensors (Dissolved Oxygen, Chl-a, pH).</a:t>
+            </a:r>
+          </a:p>
+        </p:txBody>
+      </p:sp>
+      <p:sp>
+        <p:nvSpPr>
+          <p:cNvPr id="56" name="Rounded Rectangle 55"/>
+          <p:cNvSpPr/>
+          <p:nvPr/>
+        </p:nvSpPr>
+        <p:spPr>
+          <a:xfrm>
+            <a:off x="11338560" y="8750808"/>
+            <a:ext cx="6217920" cy="621792"/>
+          </a:xfrm>
+          <a:prstGeom prst="roundRect">
+            <a:avLst/>
+          </a:prstGeom>
+          <a:solidFill>
+            <a:srgbClr val="ECFDF5"/>
+          </a:solidFill>
+          <a:ln w="12700">
+            <a:solidFill>
+              <a:srgbClr val="E2E8F0"/>
+            </a:solidFill>
+          </a:ln>
+        </p:spPr>
+        <p:style>
+          <a:lnRef idx="1">
+            <a:schemeClr val="accent1"/>
+          </a:lnRef>
+          <a:fillRef idx="3">
+            <a:schemeClr val="accent1"/>
+          </a:fillRef>
+          <a:effectRef idx="2">
+            <a:schemeClr val="accent1"/>
+          </a:effectRef>
+          <a:fontRef idx="minor">
+            <a:schemeClr val="lt1"/>
+          </a:fontRef>
+        </p:style>
+        <p:txBody>
+          <a:bodyPr rtlCol="0" anchor="ctr"/>
+          <a:lstStyle/>
+          <a:p>
+            <a:pPr algn="ctr"/>
+          </a:p>
+        </p:txBody>
+      </p:sp>
+      <p:sp>
+        <p:nvSpPr>
+          <p:cNvPr id="57" name="Rounded Rectangle 56"/>
+          <p:cNvSpPr/>
+          <p:nvPr/>
+        </p:nvSpPr>
+        <p:spPr>
+          <a:xfrm>
+            <a:off x="11430000" y="8860536"/>
+            <a:ext cx="1600200" cy="402336"/>
+          </a:xfrm>
+          <a:prstGeom prst="roundRect">
+            <a:avLst/>
+          </a:prstGeom>
+          <a:solidFill>
+            <a:srgbClr val="047857"/>
+          </a:solidFill>
+          <a:ln>
+            <a:solidFill>
+              <a:srgbClr val="047857"/>
+            </a:solidFill>
+          </a:ln>
+        </p:spPr>
+        <p:style>
+          <a:lnRef idx="1">
+            <a:schemeClr val="accent1"/>
+          </a:lnRef>
+          <a:fillRef idx="3">
+            <a:schemeClr val="accent1"/>
+          </a:fillRef>
+          <a:effectRef idx="2">
+            <a:schemeClr val="accent1"/>
+          </a:effectRef>
+          <a:fontRef idx="minor">
+            <a:schemeClr val="lt1"/>
+          </a:fontRef>
+        </p:style>
+        <p:txBody>
+          <a:bodyPr rtlCol="0" anchor="ctr"/>
+          <a:lstStyle/>
+          <a:p>
+            <a:pPr algn="ctr">
+              <a:defRPr sz="850" b="1">
+                <a:solidFill>
+                  <a:srgbClr val="FFFFFF"/>
+                </a:solidFill>
+                <a:latin typeface="Calibri"/>
+              </a:defRPr>
+            </a:pPr>
+            <a:r>
+              <a:t>PHASE 4 [SCALE]</a:t>
+            </a:r>
+          </a:p>
+        </p:txBody>
+      </p:sp>
+      <p:sp>
+        <p:nvSpPr>
+          <p:cNvPr id="58" name="TextBox 57"/>
+          <p:cNvSpPr txBox="1"/>
+          <p:nvPr/>
+        </p:nvSpPr>
+        <p:spPr>
+          <a:xfrm>
+            <a:off x="13121640" y="8823960"/>
+            <a:ext cx="4343400" cy="475488"/>
+          </a:xfrm>
+          <a:prstGeom prst="rect">
+            <a:avLst/>
+          </a:prstGeom>
+          <a:noFill/>
+        </p:spPr>
+        <p:txBody>
+          <a:bodyPr wrap="square" lIns="0" tIns="0" rIns="0" bIns="0">
+            <a:spAutoFit/>
+          </a:bodyPr>
+          <a:lstStyle/>
           <a:p>
             <a:pPr>
-              <a:spcAft>
-                <a:spcPts val="400"/>
-              </a:spcAft>
-              <a:defRPr sz="919">
+              <a:defRPr sz="860">
                 <a:solidFill>
                   <a:srgbClr val="1E293B"/>
                 </a:solidFill>
@@ -9231,65 +11146,7 @@
               </a:defRPr>
             </a:pPr>
             <a:r>
-              <a:t>Operational integration with INCOIS SAMUDRA app &amp; IMD cyclone advisory system.</a:t>
-            </a:r>
-          </a:p>
-          <a:p>
-            <a:pPr>
-              <a:defRPr sz="1050" b="1">
-                <a:solidFill>
-                  <a:srgbClr val="0077B6"/>
-                </a:solidFill>
-                <a:latin typeface="Calibri"/>
-              </a:defRPr>
-            </a:pPr>
-            <a:r>
-              <a:t>Year 2</a:t>
-            </a:r>
-          </a:p>
-          <a:p>
-            <a:pPr>
-              <a:spcAft>
-                <a:spcPts val="400"/>
-              </a:spcAft>
-              <a:defRPr sz="919">
-                <a:solidFill>
-                  <a:srgbClr val="1E293B"/>
-                </a:solidFill>
-                <a:latin typeface="Calibri"/>
-              </a:defRPr>
-            </a:pPr>
-            <a:r>
-              <a:t>Pan-Indian Ocean expansion; addition of BGC-Argo variables (DO, Chlorophyll, pH).</a:t>
-            </a:r>
-          </a:p>
-          <a:p>
-            <a:pPr>
-              <a:defRPr sz="1050" b="1">
-                <a:solidFill>
-                  <a:srgbClr val="0077B6"/>
-                </a:solidFill>
-                <a:latin typeface="Calibri"/>
-              </a:defRPr>
-            </a:pPr>
-            <a:r>
-              <a:t>National Adoption</a:t>
-            </a:r>
-          </a:p>
-          <a:p>
-            <a:pPr>
-              <a:spcAft>
-                <a:spcPts val="400"/>
-              </a:spcAft>
-              <a:defRPr sz="919">
-                <a:solidFill>
-                  <a:srgbClr val="1E293B"/>
-                </a:solidFill>
-                <a:latin typeface="Calibri"/>
-              </a:defRPr>
-            </a:pPr>
-            <a:r>
-              <a:t>MoES Deep Ocean Mission &amp; INCOIS national marine forecasting infrastructure.</a:t>
+              <a:t>Full institutional handover to MoES Deep Ocean Mission &amp; INCOIS national marine forecasting infrastructure.</a:t>
             </a:r>
           </a:p>
         </p:txBody>
@@ -9336,7 +11193,7 @@
         </p:blipFill>
         <p:spPr>
           <a:xfrm>
-            <a:off x="548640" y="182880"/>
+            <a:off x="548640" y="164592"/>
             <a:ext cx="2011680" cy="670560"/>
           </a:xfrm>
           <a:prstGeom prst="rect">
@@ -9352,8 +11209,8 @@
         </p:nvSpPr>
         <p:spPr>
           <a:xfrm>
-            <a:off x="2743200" y="182880"/>
-            <a:ext cx="12070080" cy="822960"/>
+            <a:off x="2743200" y="164592"/>
+            <a:ext cx="12344400" cy="841248"/>
           </a:xfrm>
           <a:prstGeom prst="rect">
             <a:avLst/>
@@ -9367,7 +11224,7 @@
           <a:lstStyle/>
           <a:p>
             <a:pPr>
-              <a:defRPr sz="2600" b="1">
+              <a:defRPr sz="2500" b="1">
                 <a:solidFill>
                   <a:srgbClr val="0A2540"/>
                 </a:solidFill>
@@ -9380,7 +11237,7 @@
           </a:p>
           <a:p>
             <a:pPr>
-              <a:defRPr sz="1300" b="1">
+              <a:defRPr sz="1250" b="1">
                 <a:solidFill>
                   <a:srgbClr val="0077B6"/>
                 </a:solidFill>
@@ -9409,8 +11266,8 @@
         </p:blipFill>
         <p:spPr>
           <a:xfrm>
-            <a:off x="15361920" y="137160"/>
-            <a:ext cx="2377440" cy="1123085"/>
+            <a:off x="15453359" y="137160"/>
+            <a:ext cx="2286000" cy="1079890"/>
           </a:xfrm>
           <a:prstGeom prst="rect">
             <a:avLst/>
@@ -9669,8 +11526,8 @@
           <p:nvPr/>
         </p:nvGraphicFramePr>
         <p:xfrm>
-          <a:off x="731520" y="1737360"/>
-          <a:ext cx="9692640" cy="7589520"/>
+          <a:off x="731520" y="1719072"/>
+          <a:ext cx="9692640" cy="7635240"/>
         </p:xfrm>
         <a:graphic>
           <a:graphicData uri="http://schemas.openxmlformats.org/drawingml/2006/table">
@@ -9682,13 +11539,13 @@
                 <a:gridCol w="6217920"/>
                 <a:gridCol w="3474720"/>
               </a:tblGrid>
-              <a:tr h="1084217">
+              <a:tr h="1090748">
                 <a:tc>
                   <a:txBody>
-                    <a:bodyPr/>
+                    <a:bodyPr wrap="square"/>
                     <a:lstStyle/>
                     <a:p>
-                      <a:pPr>
+                      <a:pPr algn="l">
                         <a:defRPr sz="1100" b="1">
                           <a:solidFill>
                             <a:srgbClr val="FFFFFF"/>
@@ -9701,7 +11558,7 @@
                       </a:r>
                     </a:p>
                   </a:txBody>
-                  <a:tcPr>
+                  <a:tcPr marL="109728" marR="109728" marT="73152" marB="73152" anchor="ctr">
                     <a:solidFill>
                       <a:srgbClr val="0A2540"/>
                     </a:solidFill>
@@ -9709,10 +11566,10 @@
                 </a:tc>
                 <a:tc>
                   <a:txBody>
-                    <a:bodyPr/>
+                    <a:bodyPr wrap="square"/>
                     <a:lstStyle/>
                     <a:p>
-                      <a:pPr>
+                      <a:pPr algn="l">
                         <a:defRPr sz="1100" b="1">
                           <a:solidFill>
                             <a:srgbClr val="FFFFFF"/>
@@ -9725,21 +11582,21 @@
                       </a:r>
                     </a:p>
                   </a:txBody>
-                  <a:tcPr>
+                  <a:tcPr marL="109728" marR="109728" marT="73152" marB="73152" anchor="ctr">
                     <a:solidFill>
                       <a:srgbClr val="0A2540"/>
                     </a:solidFill>
                   </a:tcPr>
                 </a:tc>
               </a:tr>
-              <a:tr h="1084217">
+              <a:tr h="1090748">
                 <a:tc>
                   <a:txBody>
-                    <a:bodyPr/>
+                    <a:bodyPr wrap="square"/>
                     <a:lstStyle/>
                     <a:p>
-                      <a:pPr>
-                        <a:defRPr sz="950">
+                      <a:pPr algn="l">
+                        <a:defRPr sz="940" b="0">
                           <a:solidFill>
                             <a:srgbClr val="1E293B"/>
                           </a:solidFill>
@@ -9751,7 +11608,7 @@
                       </a:r>
                     </a:p>
                   </a:txBody>
-                  <a:tcPr>
+                  <a:tcPr marL="109728" marR="109728" marT="73152" marB="73152" anchor="ctr">
                     <a:solidFill>
                       <a:srgbClr val="F1F5F9"/>
                     </a:solidFill>
@@ -9759,13 +11616,13 @@
                 </a:tc>
                 <a:tc>
                   <a:txBody>
-                    <a:bodyPr/>
+                    <a:bodyPr wrap="square"/>
                     <a:lstStyle/>
                     <a:p>
-                      <a:pPr>
-                        <a:defRPr sz="950">
+                      <a:pPr algn="l">
+                        <a:defRPr sz="940" b="0">
                           <a:solidFill>
-                            <a:srgbClr val="1E293B"/>
+                            <a:srgbClr val="0A2540"/>
                           </a:solidFill>
                           <a:latin typeface="Calibri"/>
                         </a:defRPr>
@@ -9775,21 +11632,21 @@
                       </a:r>
                     </a:p>
                   </a:txBody>
-                  <a:tcPr>
+                  <a:tcPr marL="109728" marR="109728" marT="73152" marB="73152" anchor="ctr">
                     <a:solidFill>
                       <a:srgbClr val="F1F5F9"/>
                     </a:solidFill>
                   </a:tcPr>
                 </a:tc>
               </a:tr>
-              <a:tr h="1084217">
+              <a:tr h="1090748">
                 <a:tc>
                   <a:txBody>
-                    <a:bodyPr/>
+                    <a:bodyPr wrap="square"/>
                     <a:lstStyle/>
                     <a:p>
-                      <a:pPr>
-                        <a:defRPr sz="950">
+                      <a:pPr algn="l">
+                        <a:defRPr sz="940" b="0">
                           <a:solidFill>
                             <a:srgbClr val="1E293B"/>
                           </a:solidFill>
@@ -9801,7 +11658,7 @@
                       </a:r>
                     </a:p>
                   </a:txBody>
-                  <a:tcPr>
+                  <a:tcPr marL="109728" marR="109728" marT="73152" marB="73152" anchor="ctr">
                     <a:solidFill>
                       <a:srgbClr val="FFFFFF"/>
                     </a:solidFill>
@@ -9809,13 +11666,13 @@
                 </a:tc>
                 <a:tc>
                   <a:txBody>
-                    <a:bodyPr/>
+                    <a:bodyPr wrap="square"/>
                     <a:lstStyle/>
                     <a:p>
-                      <a:pPr>
-                        <a:defRPr sz="950">
+                      <a:pPr algn="l">
+                        <a:defRPr sz="940" b="0">
                           <a:solidFill>
-                            <a:srgbClr val="1E293B"/>
+                            <a:srgbClr val="0A2540"/>
                           </a:solidFill>
                           <a:latin typeface="Calibri"/>
                         </a:defRPr>
@@ -9825,21 +11682,21 @@
                       </a:r>
                     </a:p>
                   </a:txBody>
-                  <a:tcPr>
+                  <a:tcPr marL="109728" marR="109728" marT="73152" marB="73152" anchor="ctr">
                     <a:solidFill>
                       <a:srgbClr val="FFFFFF"/>
                     </a:solidFill>
                   </a:tcPr>
                 </a:tc>
               </a:tr>
-              <a:tr h="1084217">
+              <a:tr h="1090748">
                 <a:tc>
                   <a:txBody>
-                    <a:bodyPr/>
+                    <a:bodyPr wrap="square"/>
                     <a:lstStyle/>
                     <a:p>
-                      <a:pPr>
-                        <a:defRPr sz="950">
+                      <a:pPr algn="l">
+                        <a:defRPr sz="940" b="0">
                           <a:solidFill>
                             <a:srgbClr val="1E293B"/>
                           </a:solidFill>
@@ -9851,7 +11708,7 @@
                       </a:r>
                     </a:p>
                   </a:txBody>
-                  <a:tcPr>
+                  <a:tcPr marL="109728" marR="109728" marT="73152" marB="73152" anchor="ctr">
                     <a:solidFill>
                       <a:srgbClr val="F1F5F9"/>
                     </a:solidFill>
@@ -9859,13 +11716,13 @@
                 </a:tc>
                 <a:tc>
                   <a:txBody>
-                    <a:bodyPr/>
+                    <a:bodyPr wrap="square"/>
                     <a:lstStyle/>
                     <a:p>
-                      <a:pPr>
-                        <a:defRPr sz="950">
+                      <a:pPr algn="l">
+                        <a:defRPr sz="940" b="0">
                           <a:solidFill>
-                            <a:srgbClr val="1E293B"/>
+                            <a:srgbClr val="0A2540"/>
                           </a:solidFill>
                           <a:latin typeface="Calibri"/>
                         </a:defRPr>
@@ -9875,21 +11732,21 @@
                       </a:r>
                     </a:p>
                   </a:txBody>
-                  <a:tcPr>
+                  <a:tcPr marL="109728" marR="109728" marT="73152" marB="73152" anchor="ctr">
                     <a:solidFill>
                       <a:srgbClr val="F1F5F9"/>
                     </a:solidFill>
                   </a:tcPr>
                 </a:tc>
               </a:tr>
-              <a:tr h="1084217">
+              <a:tr h="1090748">
                 <a:tc>
                   <a:txBody>
-                    <a:bodyPr/>
+                    <a:bodyPr wrap="square"/>
                     <a:lstStyle/>
                     <a:p>
-                      <a:pPr>
-                        <a:defRPr sz="950">
+                      <a:pPr algn="l">
+                        <a:defRPr sz="940" b="0">
                           <a:solidFill>
                             <a:srgbClr val="1E293B"/>
                           </a:solidFill>
@@ -9901,7 +11758,7 @@
                       </a:r>
                     </a:p>
                   </a:txBody>
-                  <a:tcPr>
+                  <a:tcPr marL="109728" marR="109728" marT="73152" marB="73152" anchor="ctr">
                     <a:solidFill>
                       <a:srgbClr val="FFFFFF"/>
                     </a:solidFill>
@@ -9909,13 +11766,13 @@
                 </a:tc>
                 <a:tc>
                   <a:txBody>
-                    <a:bodyPr/>
+                    <a:bodyPr wrap="square"/>
                     <a:lstStyle/>
                     <a:p>
-                      <a:pPr>
-                        <a:defRPr sz="950">
+                      <a:pPr algn="l">
+                        <a:defRPr sz="940" b="0">
                           <a:solidFill>
-                            <a:srgbClr val="1E293B"/>
+                            <a:srgbClr val="0A2540"/>
                           </a:solidFill>
                           <a:latin typeface="Calibri"/>
                         </a:defRPr>
@@ -9925,21 +11782,21 @@
                       </a:r>
                     </a:p>
                   </a:txBody>
-                  <a:tcPr>
+                  <a:tcPr marL="109728" marR="109728" marT="73152" marB="73152" anchor="ctr">
                     <a:solidFill>
                       <a:srgbClr val="FFFFFF"/>
                     </a:solidFill>
                   </a:tcPr>
                 </a:tc>
               </a:tr>
-              <a:tr h="1084217">
+              <a:tr h="1090748">
                 <a:tc>
                   <a:txBody>
-                    <a:bodyPr/>
+                    <a:bodyPr wrap="square"/>
                     <a:lstStyle/>
                     <a:p>
-                      <a:pPr>
-                        <a:defRPr sz="950">
+                      <a:pPr algn="l">
+                        <a:defRPr sz="940" b="0">
                           <a:solidFill>
                             <a:srgbClr val="1E293B"/>
                           </a:solidFill>
@@ -9951,7 +11808,7 @@
                       </a:r>
                     </a:p>
                   </a:txBody>
-                  <a:tcPr>
+                  <a:tcPr marL="109728" marR="109728" marT="73152" marB="73152" anchor="ctr">
                     <a:solidFill>
                       <a:srgbClr val="F1F5F9"/>
                     </a:solidFill>
@@ -9959,13 +11816,13 @@
                 </a:tc>
                 <a:tc>
                   <a:txBody>
-                    <a:bodyPr/>
+                    <a:bodyPr wrap="square"/>
                     <a:lstStyle/>
                     <a:p>
-                      <a:pPr>
-                        <a:defRPr sz="950">
+                      <a:pPr algn="l">
+                        <a:defRPr sz="940" b="0">
                           <a:solidFill>
-                            <a:srgbClr val="1E293B"/>
+                            <a:srgbClr val="0A2540"/>
                           </a:solidFill>
                           <a:latin typeface="Calibri"/>
                         </a:defRPr>
@@ -9975,21 +11832,21 @@
                       </a:r>
                     </a:p>
                   </a:txBody>
-                  <a:tcPr>
+                  <a:tcPr marL="109728" marR="109728" marT="73152" marB="73152" anchor="ctr">
                     <a:solidFill>
                       <a:srgbClr val="F1F5F9"/>
                     </a:solidFill>
                   </a:tcPr>
                 </a:tc>
               </a:tr>
-              <a:tr h="1084218">
+              <a:tr h="1090752">
                 <a:tc>
                   <a:txBody>
-                    <a:bodyPr/>
+                    <a:bodyPr wrap="square"/>
                     <a:lstStyle/>
                     <a:p>
-                      <a:pPr>
-                        <a:defRPr sz="950">
+                      <a:pPr algn="l">
+                        <a:defRPr sz="940" b="0">
                           <a:solidFill>
                             <a:srgbClr val="1E293B"/>
                           </a:solidFill>
@@ -10001,7 +11858,7 @@
                       </a:r>
                     </a:p>
                   </a:txBody>
-                  <a:tcPr>
+                  <a:tcPr marL="109728" marR="109728" marT="73152" marB="73152" anchor="ctr">
                     <a:solidFill>
                       <a:srgbClr val="FFFFFF"/>
                     </a:solidFill>
@@ -10009,13 +11866,13 @@
                 </a:tc>
                 <a:tc>
                   <a:txBody>
-                    <a:bodyPr/>
+                    <a:bodyPr wrap="square"/>
                     <a:lstStyle/>
                     <a:p>
-                      <a:pPr>
-                        <a:defRPr sz="950">
+                      <a:pPr algn="l">
+                        <a:defRPr sz="940" b="0">
                           <a:solidFill>
-                            <a:srgbClr val="1E293B"/>
+                            <a:srgbClr val="0A2540"/>
                           </a:solidFill>
                           <a:latin typeface="Calibri"/>
                         </a:defRPr>
@@ -10025,7 +11882,7 @@
                       </a:r>
                     </a:p>
                   </a:txBody>
-                  <a:tcPr>
+                  <a:tcPr marL="109728" marR="109728" marT="73152" marB="73152" anchor="ctr">
                     <a:solidFill>
                       <a:srgbClr val="FFFFFF"/>
                     </a:solidFill>
@@ -10090,7 +11947,7 @@
         <p:spPr>
           <a:xfrm>
             <a:off x="11064240" y="1325880"/>
-            <a:ext cx="6492240" cy="320040"/>
+            <a:ext cx="6492240" cy="292608"/>
           </a:xfrm>
           <a:prstGeom prst="rect">
             <a:avLst/>
@@ -10151,7 +12008,7 @@
               </a:defRPr>
             </a:pPr>
             <a:r>
-              <a:t>• SST (OSTIA 0.05° Daily): CMEMS doi:10.48670/moi-00168</a:t>
+              <a:t>✔ SST (OSTIA 0.05° Daily): CMEMS doi:10.48670/moi-00168</a:t>
             </a:r>
           </a:p>
           <a:p>
@@ -10167,7 +12024,7 @@
               </a:defRPr>
             </a:pPr>
             <a:r>
-              <a:t>• SSS (SMAP/SMOS 0.125° Daily): CMEMS doi:10.48670/moi-00051</a:t>
+              <a:t>✔ SSS (SMAP/SMOS 0.125° Daily): CMEMS doi:10.48670/moi-00051</a:t>
             </a:r>
           </a:p>
           <a:p>
@@ -10183,7 +12040,7 @@
               </a:defRPr>
             </a:pPr>
             <a:r>
-              <a:t>• SSH/SLA (DUACS 0.25° Daily): CMEMS doi:10.48670/moi-00145</a:t>
+              <a:t>✔ SSH/SLA (DUACS 0.25° Daily): CMEMS doi:10.48670/moi-00145</a:t>
             </a:r>
           </a:p>
           <a:p>
@@ -10199,7 +12056,7 @@
               </a:defRPr>
             </a:pPr>
             <a:r>
-              <a:t>• Currents &amp; Winds: OSCAR &amp; CCMP 0.25° (PO.DAAC)</a:t>
+              <a:t>✔ Currents &amp; Winds: OSCAR &amp; CCMP 0.25° (PO.DAAC)</a:t>
             </a:r>
           </a:p>
           <a:p>
@@ -10215,7 +12072,7 @@
               </a:defRPr>
             </a:pPr>
             <a:r>
-              <a:t>• In-Situ Ground Truth: INCOIS LAS Gridded ARGO Profilers</a:t>
+              <a:t>✔ In-Situ Ground Truth: INCOIS LAS Gridded ARGO Profilers</a:t>
             </a:r>
           </a:p>
         </p:txBody>
@@ -10274,7 +12131,7 @@
         <p:spPr>
           <a:xfrm>
             <a:off x="11064240" y="3913632"/>
-            <a:ext cx="6492240" cy="320040"/>
+            <a:ext cx="6492240" cy="292608"/>
           </a:xfrm>
           <a:prstGeom prst="rect">
             <a:avLst/>
@@ -10317,8 +12174,8 @@
         </p:blipFill>
         <p:spPr>
           <a:xfrm>
-            <a:off x="10972800" y="4251960"/>
-            <a:ext cx="6675120" cy="3063240"/>
+            <a:off x="10972800" y="4279392"/>
+            <a:ext cx="6675120" cy="3017520"/>
           </a:xfrm>
           <a:prstGeom prst="rect">
             <a:avLst/>
@@ -10333,8 +12190,8 @@
         </p:nvSpPr>
         <p:spPr>
           <a:xfrm>
-            <a:off x="10881360" y="7589520"/>
-            <a:ext cx="6858000" cy="1965960"/>
+            <a:off x="10881360" y="7543800"/>
+            <a:ext cx="6858000" cy="2011680"/>
           </a:xfrm>
           <a:prstGeom prst="roundRect">
             <a:avLst/>
@@ -10378,7 +12235,7 @@
         </p:nvSpPr>
         <p:spPr>
           <a:xfrm>
-            <a:off x="11064240" y="7662672"/>
+            <a:off x="11064240" y="7635240"/>
             <a:ext cx="6492240" cy="1828800"/>
           </a:xfrm>
           <a:prstGeom prst="rect">
@@ -10410,9 +12267,9 @@
           <a:p>
             <a:pPr>
               <a:spcAft>
-                <a:spcPts val="600"/>
+                <a:spcPts val="400"/>
               </a:spcAft>
-              <a:defRPr sz="950" b="1">
+              <a:defRPr sz="919" b="1">
                 <a:solidFill>
                   <a:srgbClr val="0A2540"/>
                 </a:solidFill>
@@ -10420,7 +12277,7 @@
               </a:defRPr>
             </a:pPr>
             <a:r>
-              <a:t>INCOIS LAS In-Situ ARGO Floats  &gt;  CMEMS GLORYS12V1 Reanalysis  &gt;  Theoretical PINN Bounds  &gt;  Academic Literature.</a:t>
+              <a:t>INCOIS LAS In-Situ ARGO Floats  ➔  CMEMS GLORYS12V1 Reanalysis  ➔  Theoretical PINN Bounds  ➔  Peer Literature</a:t>
             </a:r>
           </a:p>
           <a:p>
@@ -10433,7 +12290,7 @@
               </a:defRPr>
             </a:pPr>
             <a:r>
-              <a:t>Future Expansion: Full BGC-Argo biogeochemical parameter reconstruction (DO, Chlorophyll, pH), Pan-Indian Ocean basin coverage, and direct API dissemination into the INCOIS SAMUDRA mobile application.</a:t>
+              <a:t>Future Expansion: Full BGC-Argo biogeochemical parameter reconstruction (Dissolved Oxygen, Chlorophyll-a, pH), Pan-Indian Ocean basin coverage, and direct API dissemination into the INCOIS SAMUDRA mobile application.</a:t>
             </a:r>
           </a:p>
         </p:txBody>
